--- a/분과 안내판.pptx
+++ b/분과 안내판.pptx
@@ -1199,7 +1199,7 @@
 
 <file path=ppt/slideLayouts/slideLayout2.xml><?xml version="1.0" encoding="utf-8"?>
 <p:sldLayout xmlns:a="http://schemas.openxmlformats.org/drawingml/2006/main" xmlns:r="http://schemas.openxmlformats.org/officeDocument/2006/relationships" xmlns:p="http://schemas.openxmlformats.org/presentationml/2006/main" preserve="1">
-  <p:cSld name="분과">
+  <p:cSld name="안내판">
     <p:bg>
       <p:bgPr>
         <a:solidFill>
@@ -1231,8 +1231,8 @@
         </p:nvSpPr>
         <p:spPr>
           <a:xfrm>
-            <a:off x="822960" y="914400"/>
-            <a:ext cx="9043416" cy="548640"/>
+            <a:off x="822960" y="384048"/>
+            <a:ext cx="6400800" cy="411480"/>
           </a:xfrm>
           <a:prstGeom prst="rect">
             <a:avLst/>
@@ -1243,9 +1243,9 @@
         <p:txBody>
           <a:bodyPr wrap="square" rtlCol="0"/>
           <a:lstStyle>
-            <a:lvl1pPr algn="ctr" indent="0" marL="0">
+            <a:lvl1pPr algn="l" indent="0" marL="0">
               <a:buNone/>
-              <a:defRPr lang="en-US" sz="2200" dirty="0">
+              <a:defRPr lang="en-US" sz="1400" dirty="0">
                 <a:solidFill>
                   <a:schemeClr val="tx2"/>
                 </a:solidFill>
@@ -1253,10 +1253,10 @@
             </a:lvl1pPr>
           </a:lstStyle>
           <a:p>
-            <a:pPr algn="ctr" indent="0" marL="0">
+            <a:pPr algn="l" indent="0" marL="0">
               <a:buNone/>
             </a:pPr>
-            <a:endParaRPr lang="en-US" sz="2200" dirty="0"/>
+            <a:endParaRPr lang="en-US" sz="1400" dirty="0"/>
           </a:p>
         </p:txBody>
       </p:sp>
@@ -1270,8 +1270,8 @@
         </p:nvSpPr>
         <p:spPr>
           <a:xfrm>
-            <a:off x="822960" y="6172200"/>
-            <a:ext cx="9043416" cy="457200"/>
+            <a:off x="7223760" y="384048"/>
+            <a:ext cx="2642616" cy="411480"/>
           </a:xfrm>
           <a:prstGeom prst="rect">
             <a:avLst/>
@@ -1282,9 +1282,9 @@
         <p:txBody>
           <a:bodyPr wrap="square" rtlCol="0"/>
           <a:lstStyle>
-            <a:lvl1pPr algn="ctr" indent="0" marL="0">
+            <a:lvl1pPr algn="r" indent="0" marL="0">
               <a:buNone/>
-              <a:defRPr lang="en-US" sz="2000" dirty="0">
+              <a:defRPr lang="en-US" sz="1400" b="1" dirty="0">
                 <a:solidFill>
                   <a:schemeClr val="tx2"/>
                 </a:solidFill>
@@ -1292,237 +1292,10 @@
             </a:lvl1pPr>
           </a:lstStyle>
           <a:p>
-            <a:pPr algn="ctr" indent="0" marL="0">
+            <a:pPr algn="r" indent="0" marL="0">
               <a:buNone/>
             </a:pPr>
-            <a:endParaRPr lang="en-US" sz="2000" dirty="0"/>
-          </a:p>
-        </p:txBody>
-      </p:sp>
-      <p:sp>
-        <p:nvSpPr>
-          <p:cNvPr id="4" name="Text 0"/>
-          <p:cNvSpPr/>
-          <p:nvPr>
-            <p:ph idx="102" type="title" hasCustomPrompt="1"/>
-          </p:nvPr>
-        </p:nvSpPr>
-        <p:spPr>
-          <a:xfrm>
-            <a:off x="822960" y="2560320"/>
-            <a:ext cx="9043416" cy="2377440"/>
-          </a:xfrm>
-          <a:prstGeom prst="rect">
-            <a:avLst/>
-          </a:prstGeom>
-          <a:noFill/>
-          <a:ln/>
-        </p:spPr>
-        <p:txBody>
-          <a:bodyPr wrap="square" rtlCol="0"/>
-          <a:lstStyle>
-            <a:lvl1pPr algn="ctr" indent="0" marL="0">
-              <a:buNone/>
-              <a:defRPr lang="en-US" sz="13000" b="1" dirty="0">
-                <a:solidFill>
-                  <a:schemeClr val="tx1"/>
-                </a:solidFill>
-              </a:defRPr>
-            </a:lvl1pPr>
-          </a:lstStyle>
-          <a:p>
-            <a:pPr algn="ctr" indent="0" marL="0">
-              <a:buNone/>
-            </a:pPr>
-            <a:endParaRPr lang="en-US" sz="13000" dirty="0"/>
-          </a:p>
-        </p:txBody>
-      </p:sp>
-    </p:spTree>
-  </p:cSld>
-  <p:clrMapOvr>
-    <a:masterClrMapping/>
-  </p:clrMapOvr>
-</p:sldLayout>
-</file>
-
-<file path=ppt/slideLayouts/slideLayout3.xml><?xml version="1.0" encoding="utf-8"?>
-<p:sldLayout xmlns:a="http://schemas.openxmlformats.org/drawingml/2006/main" xmlns:r="http://schemas.openxmlformats.org/officeDocument/2006/relationships" xmlns:p="http://schemas.openxmlformats.org/presentationml/2006/main" preserve="1">
-  <p:cSld name="분과 학년">
-    <p:bg>
-      <p:bgPr>
-        <a:solidFill>
-          <a:srgbClr val="FFFFFF"/>
-        </a:solidFill>
-      </p:bgPr>
-    </p:bg>
-    <p:spTree>
-      <p:nvGrpSpPr>
-        <p:cNvPr id="1" name=""/>
-        <p:cNvGrpSpPr/>
-        <p:nvPr/>
-      </p:nvGrpSpPr>
-      <p:grpSpPr>
-        <a:xfrm>
-          <a:off x="0" y="0"/>
-          <a:ext cx="0" cy="0"/>
-          <a:chOff x="0" y="0"/>
-          <a:chExt cx="0" cy="0"/>
-        </a:xfrm>
-      </p:grpSpPr>
-      <p:sp>
-        <p:nvSpPr>
-          <p:cNvPr id="2" name="Text 0"/>
-          <p:cNvSpPr/>
-          <p:nvPr>
-            <p:ph idx="100" type="body" hasCustomPrompt="1"/>
-          </p:nvPr>
-        </p:nvSpPr>
-        <p:spPr>
-          <a:xfrm>
-            <a:off x="822960" y="914400"/>
-            <a:ext cx="9043416" cy="548640"/>
-          </a:xfrm>
-          <a:prstGeom prst="rect">
-            <a:avLst/>
-          </a:prstGeom>
-          <a:noFill/>
-          <a:ln/>
-        </p:spPr>
-        <p:txBody>
-          <a:bodyPr wrap="square" rtlCol="0"/>
-          <a:lstStyle>
-            <a:lvl1pPr algn="ctr" indent="0" marL="0">
-              <a:buNone/>
-              <a:defRPr lang="en-US" sz="2200" dirty="0">
-                <a:solidFill>
-                  <a:schemeClr val="tx2"/>
-                </a:solidFill>
-              </a:defRPr>
-            </a:lvl1pPr>
-          </a:lstStyle>
-          <a:p>
-            <a:pPr algn="ctr" indent="0" marL="0">
-              <a:buNone/>
-            </a:pPr>
-            <a:endParaRPr lang="en-US" sz="2200" dirty="0"/>
-          </a:p>
-        </p:txBody>
-      </p:sp>
-      <p:sp>
-        <p:nvSpPr>
-          <p:cNvPr id="3" name="Text 0"/>
-          <p:cNvSpPr/>
-          <p:nvPr>
-            <p:ph idx="101" type="body" hasCustomPrompt="1"/>
-          </p:nvPr>
-        </p:nvSpPr>
-        <p:spPr>
-          <a:xfrm>
-            <a:off x="822960" y="6172200"/>
-            <a:ext cx="9043416" cy="457200"/>
-          </a:xfrm>
-          <a:prstGeom prst="rect">
-            <a:avLst/>
-          </a:prstGeom>
-          <a:noFill/>
-          <a:ln/>
-        </p:spPr>
-        <p:txBody>
-          <a:bodyPr wrap="square" rtlCol="0"/>
-          <a:lstStyle>
-            <a:lvl1pPr algn="ctr" indent="0" marL="0">
-              <a:buNone/>
-              <a:defRPr lang="en-US" sz="2000" dirty="0">
-                <a:solidFill>
-                  <a:schemeClr val="tx2"/>
-                </a:solidFill>
-              </a:defRPr>
-            </a:lvl1pPr>
-          </a:lstStyle>
-          <a:p>
-            <a:pPr algn="ctr" indent="0" marL="0">
-              <a:buNone/>
-            </a:pPr>
-            <a:endParaRPr lang="en-US" sz="2000" dirty="0"/>
-          </a:p>
-        </p:txBody>
-      </p:sp>
-      <p:sp>
-        <p:nvSpPr>
-          <p:cNvPr id="4" name="Text 0"/>
-          <p:cNvSpPr/>
-          <p:nvPr>
-            <p:ph idx="102" type="title" hasCustomPrompt="1"/>
-          </p:nvPr>
-        </p:nvSpPr>
-        <p:spPr>
-          <a:xfrm>
-            <a:off x="822960" y="1737360"/>
-            <a:ext cx="9043416" cy="2377440"/>
-          </a:xfrm>
-          <a:prstGeom prst="rect">
-            <a:avLst/>
-          </a:prstGeom>
-          <a:noFill/>
-          <a:ln/>
-        </p:spPr>
-        <p:txBody>
-          <a:bodyPr wrap="square" rtlCol="0"/>
-          <a:lstStyle>
-            <a:lvl1pPr algn="ctr" indent="0" marL="0">
-              <a:buNone/>
-              <a:defRPr lang="en-US" sz="13000" b="1" dirty="0">
-                <a:solidFill>
-                  <a:schemeClr val="tx1"/>
-                </a:solidFill>
-              </a:defRPr>
-            </a:lvl1pPr>
-          </a:lstStyle>
-          <a:p>
-            <a:pPr algn="ctr" indent="0" marL="0">
-              <a:buNone/>
-            </a:pPr>
-            <a:endParaRPr lang="en-US" sz="13000" dirty="0"/>
-          </a:p>
-        </p:txBody>
-      </p:sp>
-      <p:sp>
-        <p:nvSpPr>
-          <p:cNvPr id="5" name="Text 0"/>
-          <p:cNvSpPr/>
-          <p:nvPr>
-            <p:ph idx="103" type="body" hasCustomPrompt="1"/>
-          </p:nvPr>
-        </p:nvSpPr>
-        <p:spPr>
-          <a:xfrm>
-            <a:off x="822960" y="4480560"/>
-            <a:ext cx="9043416" cy="1371600"/>
-          </a:xfrm>
-          <a:prstGeom prst="rect">
-            <a:avLst/>
-          </a:prstGeom>
-          <a:noFill/>
-          <a:ln/>
-        </p:spPr>
-        <p:txBody>
-          <a:bodyPr wrap="square" rtlCol="0"/>
-          <a:lstStyle>
-            <a:lvl1pPr algn="ctr" indent="0" marL="0">
-              <a:buNone/>
-              <a:defRPr lang="en-US" sz="8000" b="1" dirty="0">
-                <a:solidFill>
-                  <a:schemeClr val="tx1"/>
-                </a:solidFill>
-              </a:defRPr>
-            </a:lvl1pPr>
-          </a:lstStyle>
-          <a:p>
-            <a:pPr algn="ctr" indent="0" marL="0">
-              <a:buNone/>
-            </a:pPr>
-            <a:endParaRPr lang="en-US" sz="8000" dirty="0"/>
+            <a:endParaRPr lang="en-US" sz="1400" dirty="0"/>
           </a:p>
         </p:txBody>
       </p:sp>
@@ -1557,7 +1330,6 @@
   <p:sldLayoutIdLst>
     <p:sldLayoutId id="2147483649" r:id="rId1"/>
     <p:sldLayoutId id="2147483650" r:id="rId2"/>
-    <p:sldLayoutId id="2147483651" r:id="rId3"/>
   </p:sldLayoutIdLst>
   <p:hf sldNum="0" hdr="0" ftr="0" dt="0"/>
   <p:txStyles>
@@ -1816,6 +1588,13 @@
 <file path=ppt/slides/slide1.xml><?xml version="1.0" encoding="utf-8"?>
 <p:sld xmlns:a="http://schemas.openxmlformats.org/drawingml/2006/main" xmlns:r="http://schemas.openxmlformats.org/officeDocument/2006/relationships" xmlns:p="http://schemas.openxmlformats.org/presentationml/2006/main">
   <p:cSld name="Slide 1">
+    <p:bg>
+      <p:bgPr>
+        <a:solidFill>
+          <a:srgbClr val="FBF4F9"/>
+        </a:solidFill>
+      </p:bgPr>
+    </p:bg>
     <p:spTree>
       <p:nvGrpSpPr>
         <p:cNvPr id="1" name=""/>
@@ -1832,43 +1611,96 @@
       </p:grpSpPr>
       <p:sp>
         <p:nvSpPr>
-          <p:cNvPr id="2" name="카드"/>
-          <p:cNvSpPr/>
-          <p:nvPr/>
-        </p:nvSpPr>
-        <p:spPr>
-          <a:xfrm>
-            <a:off x="457200" y="457200"/>
-            <a:ext cx="9774936" cy="6647688"/>
+          <p:cNvPr id="2" name="장식 원"/>
+          <p:cNvSpPr/>
+          <p:nvPr/>
+        </p:nvSpPr>
+        <p:spPr>
+          <a:xfrm>
+            <a:off x="7955280" y="4846320"/>
+            <a:ext cx="4023360" cy="4023360"/>
+          </a:xfrm>
+          <a:prstGeom prst="ellipse">
+            <a:avLst/>
+          </a:prstGeom>
+          <a:solidFill>
+            <a:srgbClr val="F3DDEE">
+              <a:alpha val="70000"/>
+            </a:srgbClr>
+          </a:solidFill>
+          <a:ln/>
+        </p:spPr>
+      </p:sp>
+      <p:sp>
+        <p:nvSpPr>
+          <p:cNvPr id="3" name="장식 원"/>
+          <p:cNvSpPr/>
+          <p:nvPr/>
+        </p:nvSpPr>
+        <p:spPr>
+          <a:xfrm>
+            <a:off x="-1463040" y="-1463040"/>
+            <a:ext cx="2377440" cy="2377440"/>
+          </a:xfrm>
+          <a:prstGeom prst="ellipse">
+            <a:avLst/>
+          </a:prstGeom>
+          <a:solidFill>
+            <a:srgbClr val="F3DDEE">
+              <a:alpha val="60000"/>
+            </a:srgbClr>
+          </a:solidFill>
+          <a:ln/>
+        </p:spPr>
+      </p:sp>
+      <p:sp>
+        <p:nvSpPr>
+          <p:cNvPr id="4" name="카드"/>
+          <p:cNvSpPr/>
+          <p:nvPr/>
+        </p:nvSpPr>
+        <p:spPr>
+          <a:xfrm>
+            <a:off x="822960" y="1005840"/>
+            <a:ext cx="9043416" cy="5577840"/>
           </a:xfrm>
           <a:prstGeom prst="roundRect">
             <a:avLst>
-              <a:gd name="adj" fmla="val 4814"/>
+              <a:gd name="adj" fmla="val 6557"/>
             </a:avLst>
           </a:prstGeom>
           <a:solidFill>
-            <a:schemeClr val="accent1"/>
-          </a:solidFill>
-          <a:ln/>
-        </p:spPr>
-      </p:sp>
-      <p:sp>
-        <p:nvSpPr>
-          <p:cNvPr id="3" name="Text 0"/>
-          <p:cNvSpPr/>
-          <p:nvPr>
-            <p:ph idx="100" type="body" hasCustomPrompt="1"/>
-          </p:nvPr>
-        </p:nvSpPr>
-        <p:spPr>
-          <a:xfrm>
-            <a:off x="822960" y="914400"/>
-            <a:ext cx="9043416" cy="548640"/>
-          </a:xfrm>
-          <a:prstGeom prst="rect">
-            <a:avLst/>
-          </a:prstGeom>
-          <a:noFill/>
+            <a:srgbClr val="FFFFFF"/>
+          </a:solidFill>
+          <a:ln/>
+          <a:effectLst>
+            <a:outerShdw sx="100000" sy="100000" kx="0" ky="0" algn="bl" rotWithShape="0" blurRad="228600" dist="50800" dir="5400000">
+              <a:srgbClr val="000000">
+                <a:alpha val="10000"/>
+              </a:srgbClr>
+            </a:outerShdw>
+          </a:effectLst>
+        </p:spPr>
+      </p:sp>
+      <p:sp>
+        <p:nvSpPr>
+          <p:cNvPr id="5" name="라벨"/>
+          <p:cNvSpPr txBox="1"/>
+          <p:nvPr/>
+        </p:nvSpPr>
+        <p:spPr>
+          <a:xfrm>
+            <a:off x="4201668" y="1417320"/>
+            <a:ext cx="2286000" cy="475488"/>
+          </a:xfrm>
+          <a:prstGeom prst="roundRect">
+            <a:avLst>
+              <a:gd name="adj" fmla="val 50000"/>
+            </a:avLst>
+          </a:prstGeom>
+          <a:solidFill>
+            <a:srgbClr val="F3DDEE"/>
+          </a:solidFill>
           <a:ln/>
         </p:spPr>
         <p:txBody>
@@ -1879,29 +1711,147 @@
               <a:buNone/>
             </a:pPr>
             <a:r>
-              <a:rPr lang="en-US" sz="2200" dirty="0">
+              <a:rPr lang="en-US" sz="1800" dirty="0">
+                <a:solidFill>
+                  <a:srgbClr val="9B4D8A"/>
+                </a:solidFill>
+              </a:rPr>
+              <a:t>본교 교원석</a:t>
+            </a:r>
+            <a:endParaRPr lang="en-US" sz="1800" dirty="0"/>
+          </a:p>
+        </p:txBody>
+      </p:sp>
+      <p:sp>
+        <p:nvSpPr>
+          <p:cNvPr id="6" name="장식 원"/>
+          <p:cNvSpPr/>
+          <p:nvPr/>
+        </p:nvSpPr>
+        <p:spPr>
+          <a:xfrm>
+            <a:off x="4681728" y="2331720"/>
+            <a:ext cx="1325880" cy="1325880"/>
+          </a:xfrm>
+          <a:prstGeom prst="ellipse">
+            <a:avLst/>
+          </a:prstGeom>
+          <a:solidFill>
+            <a:srgbClr val="F3DDEE"/>
+          </a:solidFill>
+          <a:ln/>
+        </p:spPr>
+      </p:sp>
+      <p:pic>
+        <p:nvPicPr>
+          <p:cNvPr id="7" name="아이콘" descr="기획분과 아이콘">    </p:cNvPr>
+          <p:cNvPicPr>
+            <a:picLocks noChangeAspect="1"/>
+          </p:cNvPicPr>
+          <p:nvPr/>
+        </p:nvPicPr>
+        <p:blipFill>
+          <a:blip r:embed="rId1"/>
+          <a:stretch>
+            <a:fillRect/>
+          </a:stretch>
+        </p:blipFill>
+        <p:spPr>
+          <a:xfrm>
+            <a:off x="4946904" y="2596896"/>
+            <a:ext cx="795528" cy="795528"/>
+          </a:xfrm>
+          <a:prstGeom prst="rect">
+            <a:avLst/>
+          </a:prstGeom>
+        </p:spPr>
+      </p:pic>
+      <p:sp>
+        <p:nvSpPr>
+          <p:cNvPr id="8" name="분과명"/>
+          <p:cNvSpPr txBox="1"/>
+          <p:nvPr/>
+        </p:nvSpPr>
+        <p:spPr>
+          <a:xfrm>
+            <a:off x="822960" y="3794760"/>
+            <a:ext cx="9043416" cy="2011680"/>
+          </a:xfrm>
+          <a:prstGeom prst="rect">
+            <a:avLst/>
+          </a:prstGeom>
+          <a:noFill/>
+          <a:ln/>
+        </p:spPr>
+        <p:txBody>
+          <a:bodyPr wrap="square" lIns="0" tIns="0" rIns="0" bIns="0" rtlCol="0" anchor="ctr"/>
+          <a:lstStyle/>
+          <a:p>
+            <a:pPr algn="ctr" indent="0" marL="0">
+              <a:buNone/>
+            </a:pPr>
+            <a:r>
+              <a:rPr lang="en-US" sz="13000" b="1" spc="400" kern="0" dirty="0">
+                <a:solidFill>
+                  <a:srgbClr val="9B4D8A"/>
+                </a:solidFill>
+              </a:rPr>
+              <a:t>기획분과</a:t>
+            </a:r>
+            <a:endParaRPr lang="en-US" sz="13000" dirty="0"/>
+          </a:p>
+        </p:txBody>
+      </p:sp>
+      <p:sp>
+        <p:nvSpPr>
+          <p:cNvPr id="9" name="Text 0"/>
+          <p:cNvSpPr/>
+          <p:nvPr>
+            <p:ph idx="100" type="body" hasCustomPrompt="1"/>
+          </p:nvPr>
+        </p:nvSpPr>
+        <p:spPr>
+          <a:xfrm>
+            <a:off x="822960" y="384048"/>
+            <a:ext cx="6400800" cy="411480"/>
+          </a:xfrm>
+          <a:prstGeom prst="rect">
+            <a:avLst/>
+          </a:prstGeom>
+          <a:noFill/>
+          <a:ln/>
+        </p:spPr>
+        <p:txBody>
+          <a:bodyPr wrap="square" lIns="0" tIns="0" rIns="0" bIns="0" rtlCol="0" anchor="ctr"/>
+          <a:lstStyle/>
+          <a:p>
+            <a:pPr algn="l" indent="0" marL="0">
+              <a:buNone/>
+            </a:pPr>
+            <a:r>
+              <a:rPr lang="en-US" sz="1400" dirty="0">
                 <a:solidFill>
                   <a:schemeClr val="tx2"/>
                 </a:solidFill>
               </a:rPr>
               <a:t>2026학년도 학교자율시간 연구학교 운영 보고회</a:t>
             </a:r>
-            <a:endParaRPr lang="en-US" sz="2200" dirty="0"/>
-          </a:p>
-        </p:txBody>
-      </p:sp>
-      <p:sp>
-        <p:nvSpPr>
-          <p:cNvPr id="4" name="Text 0"/>
-          <p:cNvSpPr/>
-          <p:nvPr>
-            <p:ph idx="102" type="title" hasCustomPrompt="1"/>
-          </p:nvPr>
-        </p:nvSpPr>
-        <p:spPr>
-          <a:xfrm>
-            <a:off x="822960" y="2560320"/>
-            <a:ext cx="9043416" cy="2377440"/>
+            <a:endParaRPr lang="en-US" sz="1400" dirty="0"/>
+          </a:p>
+        </p:txBody>
+      </p:sp>
+      <p:sp>
+        <p:nvSpPr>
+          <p:cNvPr id="10" name="Text 0"/>
+          <p:cNvSpPr/>
+          <p:nvPr>
+            <p:ph idx="101" type="body" hasCustomPrompt="1"/>
+          </p:nvPr>
+        </p:nvSpPr>
+        <p:spPr>
+          <a:xfrm>
+            <a:off x="7223760" y="384048"/>
+            <a:ext cx="2642616" cy="411480"/>
           </a:xfrm>
           <a:prstGeom prst="rect">
             <a:avLst/>
@@ -1913,56 +1863,18 @@
           <a:bodyPr wrap="square" lIns="0" tIns="0" rIns="0" bIns="0" rtlCol="0" anchor="ctr"/>
           <a:lstStyle/>
           <a:p>
-            <a:pPr algn="ctr" indent="0" marL="0">
+            <a:pPr algn="r" indent="0" marL="0">
               <a:buNone/>
             </a:pPr>
             <a:r>
-              <a:rPr lang="en-US" sz="13000" b="1" dirty="0">
-                <a:solidFill>
-                  <a:schemeClr val="tx1"/>
-                </a:solidFill>
-              </a:rPr>
-              <a:t>기획분과</a:t>
-            </a:r>
-            <a:endParaRPr lang="en-US" sz="13000" dirty="0"/>
-          </a:p>
-        </p:txBody>
-      </p:sp>
-      <p:sp>
-        <p:nvSpPr>
-          <p:cNvPr id="5" name="Text 0"/>
-          <p:cNvSpPr/>
-          <p:nvPr>
-            <p:ph idx="101" type="body" hasCustomPrompt="1"/>
-          </p:nvPr>
-        </p:nvSpPr>
-        <p:spPr>
-          <a:xfrm>
-            <a:off x="822960" y="6172200"/>
-            <a:ext cx="9043416" cy="457200"/>
-          </a:xfrm>
-          <a:prstGeom prst="rect">
-            <a:avLst/>
-          </a:prstGeom>
-          <a:noFill/>
-          <a:ln/>
-        </p:spPr>
-        <p:txBody>
-          <a:bodyPr wrap="square" lIns="0" tIns="0" rIns="0" bIns="0" rtlCol="0" anchor="ctr"/>
-          <a:lstStyle/>
-          <a:p>
-            <a:pPr algn="ctr" indent="0" marL="0">
-              <a:buNone/>
-            </a:pPr>
-            <a:r>
-              <a:rPr lang="en-US" sz="2000" dirty="0">
+              <a:rPr lang="en-US" sz="1400" b="1" dirty="0">
                 <a:solidFill>
                   <a:schemeClr val="tx2"/>
                 </a:solidFill>
               </a:rPr>
               <a:t>광양중동초등학교</a:t>
             </a:r>
-            <a:endParaRPr lang="en-US" sz="2000" dirty="0"/>
+            <a:endParaRPr lang="en-US" sz="1400" dirty="0"/>
           </a:p>
         </p:txBody>
       </p:sp>
@@ -1977,6 +1889,13 @@
 <file path=ppt/slides/slide2.xml><?xml version="1.0" encoding="utf-8"?>
 <p:sld xmlns:a="http://schemas.openxmlformats.org/drawingml/2006/main" xmlns:r="http://schemas.openxmlformats.org/officeDocument/2006/relationships" xmlns:p="http://schemas.openxmlformats.org/presentationml/2006/main">
   <p:cSld name="Slide 2">
+    <p:bg>
+      <p:bgPr>
+        <a:solidFill>
+          <a:srgbClr val="FDF9EC"/>
+        </a:solidFill>
+      </p:bgPr>
+    </p:bg>
     <p:spTree>
       <p:nvGrpSpPr>
         <p:cNvPr id="1" name=""/>
@@ -1993,43 +1912,96 @@
       </p:grpSpPr>
       <p:sp>
         <p:nvSpPr>
-          <p:cNvPr id="2" name="카드"/>
-          <p:cNvSpPr/>
-          <p:nvPr/>
-        </p:nvSpPr>
-        <p:spPr>
-          <a:xfrm>
-            <a:off x="457200" y="457200"/>
-            <a:ext cx="9774936" cy="6647688"/>
+          <p:cNvPr id="2" name="장식 원"/>
+          <p:cNvSpPr/>
+          <p:nvPr/>
+        </p:nvSpPr>
+        <p:spPr>
+          <a:xfrm>
+            <a:off x="7955280" y="4846320"/>
+            <a:ext cx="4023360" cy="4023360"/>
+          </a:xfrm>
+          <a:prstGeom prst="ellipse">
+            <a:avLst/>
+          </a:prstGeom>
+          <a:solidFill>
+            <a:srgbClr val="F7EAC4">
+              <a:alpha val="70000"/>
+            </a:srgbClr>
+          </a:solidFill>
+          <a:ln/>
+        </p:spPr>
+      </p:sp>
+      <p:sp>
+        <p:nvSpPr>
+          <p:cNvPr id="3" name="장식 원"/>
+          <p:cNvSpPr/>
+          <p:nvPr/>
+        </p:nvSpPr>
+        <p:spPr>
+          <a:xfrm>
+            <a:off x="-1463040" y="-1463040"/>
+            <a:ext cx="2377440" cy="2377440"/>
+          </a:xfrm>
+          <a:prstGeom prst="ellipse">
+            <a:avLst/>
+          </a:prstGeom>
+          <a:solidFill>
+            <a:srgbClr val="F7EAC4">
+              <a:alpha val="60000"/>
+            </a:srgbClr>
+          </a:solidFill>
+          <a:ln/>
+        </p:spPr>
+      </p:sp>
+      <p:sp>
+        <p:nvSpPr>
+          <p:cNvPr id="4" name="카드"/>
+          <p:cNvSpPr/>
+          <p:nvPr/>
+        </p:nvSpPr>
+        <p:spPr>
+          <a:xfrm>
+            <a:off x="822960" y="1005840"/>
+            <a:ext cx="9043416" cy="5577840"/>
           </a:xfrm>
           <a:prstGeom prst="roundRect">
             <a:avLst>
-              <a:gd name="adj" fmla="val 4814"/>
+              <a:gd name="adj" fmla="val 6557"/>
             </a:avLst>
           </a:prstGeom>
           <a:solidFill>
-            <a:schemeClr val="accent2"/>
-          </a:solidFill>
-          <a:ln/>
-        </p:spPr>
-      </p:sp>
-      <p:sp>
-        <p:nvSpPr>
-          <p:cNvPr id="3" name="Text 0"/>
-          <p:cNvSpPr/>
-          <p:nvPr>
-            <p:ph idx="100" type="body" hasCustomPrompt="1"/>
-          </p:nvPr>
-        </p:nvSpPr>
-        <p:spPr>
-          <a:xfrm>
-            <a:off x="822960" y="914400"/>
-            <a:ext cx="9043416" cy="548640"/>
-          </a:xfrm>
-          <a:prstGeom prst="rect">
-            <a:avLst/>
-          </a:prstGeom>
-          <a:noFill/>
+            <a:srgbClr val="FFFFFF"/>
+          </a:solidFill>
+          <a:ln/>
+          <a:effectLst>
+            <a:outerShdw sx="100000" sy="100000" kx="0" ky="0" algn="bl" rotWithShape="0" blurRad="228600" dist="50800" dir="5400000">
+              <a:srgbClr val="000000">
+                <a:alpha val="10000"/>
+              </a:srgbClr>
+            </a:outerShdw>
+          </a:effectLst>
+        </p:spPr>
+      </p:sp>
+      <p:sp>
+        <p:nvSpPr>
+          <p:cNvPr id="5" name="라벨"/>
+          <p:cNvSpPr txBox="1"/>
+          <p:nvPr/>
+        </p:nvSpPr>
+        <p:spPr>
+          <a:xfrm>
+            <a:off x="4201668" y="1417320"/>
+            <a:ext cx="2286000" cy="475488"/>
+          </a:xfrm>
+          <a:prstGeom prst="roundRect">
+            <a:avLst>
+              <a:gd name="adj" fmla="val 50000"/>
+            </a:avLst>
+          </a:prstGeom>
+          <a:solidFill>
+            <a:srgbClr val="F7EAC4"/>
+          </a:solidFill>
           <a:ln/>
         </p:spPr>
         <p:txBody>
@@ -2040,29 +2012,147 @@
               <a:buNone/>
             </a:pPr>
             <a:r>
-              <a:rPr lang="en-US" sz="2200" dirty="0">
+              <a:rPr lang="en-US" sz="1800" dirty="0">
+                <a:solidFill>
+                  <a:srgbClr val="94650F"/>
+                </a:solidFill>
+              </a:rPr>
+              <a:t>본교 교원석</a:t>
+            </a:r>
+            <a:endParaRPr lang="en-US" sz="1800" dirty="0"/>
+          </a:p>
+        </p:txBody>
+      </p:sp>
+      <p:sp>
+        <p:nvSpPr>
+          <p:cNvPr id="6" name="장식 원"/>
+          <p:cNvSpPr/>
+          <p:nvPr/>
+        </p:nvSpPr>
+        <p:spPr>
+          <a:xfrm>
+            <a:off x="4681728" y="2331720"/>
+            <a:ext cx="1325880" cy="1325880"/>
+          </a:xfrm>
+          <a:prstGeom prst="ellipse">
+            <a:avLst/>
+          </a:prstGeom>
+          <a:solidFill>
+            <a:srgbClr val="F7EAC4"/>
+          </a:solidFill>
+          <a:ln/>
+        </p:spPr>
+      </p:sp>
+      <p:pic>
+        <p:nvPicPr>
+          <p:cNvPr id="7" name="아이콘" descr="자료분과 아이콘">    </p:cNvPr>
+          <p:cNvPicPr>
+            <a:picLocks noChangeAspect="1"/>
+          </p:cNvPicPr>
+          <p:nvPr/>
+        </p:nvPicPr>
+        <p:blipFill>
+          <a:blip r:embed="rId1"/>
+          <a:stretch>
+            <a:fillRect/>
+          </a:stretch>
+        </p:blipFill>
+        <p:spPr>
+          <a:xfrm>
+            <a:off x="4946904" y="2596896"/>
+            <a:ext cx="795528" cy="795528"/>
+          </a:xfrm>
+          <a:prstGeom prst="rect">
+            <a:avLst/>
+          </a:prstGeom>
+        </p:spPr>
+      </p:pic>
+      <p:sp>
+        <p:nvSpPr>
+          <p:cNvPr id="8" name="분과명"/>
+          <p:cNvSpPr txBox="1"/>
+          <p:nvPr/>
+        </p:nvSpPr>
+        <p:spPr>
+          <a:xfrm>
+            <a:off x="822960" y="3794760"/>
+            <a:ext cx="9043416" cy="2011680"/>
+          </a:xfrm>
+          <a:prstGeom prst="rect">
+            <a:avLst/>
+          </a:prstGeom>
+          <a:noFill/>
+          <a:ln/>
+        </p:spPr>
+        <p:txBody>
+          <a:bodyPr wrap="square" lIns="0" tIns="0" rIns="0" bIns="0" rtlCol="0" anchor="ctr"/>
+          <a:lstStyle/>
+          <a:p>
+            <a:pPr algn="ctr" indent="0" marL="0">
+              <a:buNone/>
+            </a:pPr>
+            <a:r>
+              <a:rPr lang="en-US" sz="13000" b="1" spc="400" kern="0" dirty="0">
+                <a:solidFill>
+                  <a:srgbClr val="94650F"/>
+                </a:solidFill>
+              </a:rPr>
+              <a:t>자료분과</a:t>
+            </a:r>
+            <a:endParaRPr lang="en-US" sz="13000" dirty="0"/>
+          </a:p>
+        </p:txBody>
+      </p:sp>
+      <p:sp>
+        <p:nvSpPr>
+          <p:cNvPr id="9" name="Text 0"/>
+          <p:cNvSpPr/>
+          <p:nvPr>
+            <p:ph idx="100" type="body" hasCustomPrompt="1"/>
+          </p:nvPr>
+        </p:nvSpPr>
+        <p:spPr>
+          <a:xfrm>
+            <a:off x="822960" y="384048"/>
+            <a:ext cx="6400800" cy="411480"/>
+          </a:xfrm>
+          <a:prstGeom prst="rect">
+            <a:avLst/>
+          </a:prstGeom>
+          <a:noFill/>
+          <a:ln/>
+        </p:spPr>
+        <p:txBody>
+          <a:bodyPr wrap="square" lIns="0" tIns="0" rIns="0" bIns="0" rtlCol="0" anchor="ctr"/>
+          <a:lstStyle/>
+          <a:p>
+            <a:pPr algn="l" indent="0" marL="0">
+              <a:buNone/>
+            </a:pPr>
+            <a:r>
+              <a:rPr lang="en-US" sz="1400" dirty="0">
                 <a:solidFill>
                   <a:schemeClr val="tx2"/>
                 </a:solidFill>
               </a:rPr>
               <a:t>2026학년도 학교자율시간 연구학교 운영 보고회</a:t>
             </a:r>
-            <a:endParaRPr lang="en-US" sz="2200" dirty="0"/>
-          </a:p>
-        </p:txBody>
-      </p:sp>
-      <p:sp>
-        <p:nvSpPr>
-          <p:cNvPr id="4" name="Text 0"/>
-          <p:cNvSpPr/>
-          <p:nvPr>
-            <p:ph idx="102" type="title" hasCustomPrompt="1"/>
-          </p:nvPr>
-        </p:nvSpPr>
-        <p:spPr>
-          <a:xfrm>
-            <a:off x="822960" y="2560320"/>
-            <a:ext cx="9043416" cy="2377440"/>
+            <a:endParaRPr lang="en-US" sz="1400" dirty="0"/>
+          </a:p>
+        </p:txBody>
+      </p:sp>
+      <p:sp>
+        <p:nvSpPr>
+          <p:cNvPr id="10" name="Text 0"/>
+          <p:cNvSpPr/>
+          <p:nvPr>
+            <p:ph idx="101" type="body" hasCustomPrompt="1"/>
+          </p:nvPr>
+        </p:nvSpPr>
+        <p:spPr>
+          <a:xfrm>
+            <a:off x="7223760" y="384048"/>
+            <a:ext cx="2642616" cy="411480"/>
           </a:xfrm>
           <a:prstGeom prst="rect">
             <a:avLst/>
@@ -2074,56 +2164,18 @@
           <a:bodyPr wrap="square" lIns="0" tIns="0" rIns="0" bIns="0" rtlCol="0" anchor="ctr"/>
           <a:lstStyle/>
           <a:p>
-            <a:pPr algn="ctr" indent="0" marL="0">
+            <a:pPr algn="r" indent="0" marL="0">
               <a:buNone/>
             </a:pPr>
             <a:r>
-              <a:rPr lang="en-US" sz="13000" b="1" dirty="0">
-                <a:solidFill>
-                  <a:schemeClr val="tx1"/>
-                </a:solidFill>
-              </a:rPr>
-              <a:t>자료분과</a:t>
-            </a:r>
-            <a:endParaRPr lang="en-US" sz="13000" dirty="0"/>
-          </a:p>
-        </p:txBody>
-      </p:sp>
-      <p:sp>
-        <p:nvSpPr>
-          <p:cNvPr id="5" name="Text 0"/>
-          <p:cNvSpPr/>
-          <p:nvPr>
-            <p:ph idx="101" type="body" hasCustomPrompt="1"/>
-          </p:nvPr>
-        </p:nvSpPr>
-        <p:spPr>
-          <a:xfrm>
-            <a:off x="822960" y="6172200"/>
-            <a:ext cx="9043416" cy="457200"/>
-          </a:xfrm>
-          <a:prstGeom prst="rect">
-            <a:avLst/>
-          </a:prstGeom>
-          <a:noFill/>
-          <a:ln/>
-        </p:spPr>
-        <p:txBody>
-          <a:bodyPr wrap="square" lIns="0" tIns="0" rIns="0" bIns="0" rtlCol="0" anchor="ctr"/>
-          <a:lstStyle/>
-          <a:p>
-            <a:pPr algn="ctr" indent="0" marL="0">
-              <a:buNone/>
-            </a:pPr>
-            <a:r>
-              <a:rPr lang="en-US" sz="2000" dirty="0">
+              <a:rPr lang="en-US" sz="1400" b="1" dirty="0">
                 <a:solidFill>
                   <a:schemeClr val="tx2"/>
                 </a:solidFill>
               </a:rPr>
               <a:t>광양중동초등학교</a:t>
             </a:r>
-            <a:endParaRPr lang="en-US" sz="2000" dirty="0"/>
+            <a:endParaRPr lang="en-US" sz="1400" dirty="0"/>
           </a:p>
         </p:txBody>
       </p:sp>
@@ -2138,6 +2190,13 @@
 <file path=ppt/slides/slide3.xml><?xml version="1.0" encoding="utf-8"?>
 <p:sld xmlns:a="http://schemas.openxmlformats.org/drawingml/2006/main" xmlns:r="http://schemas.openxmlformats.org/officeDocument/2006/relationships" xmlns:p="http://schemas.openxmlformats.org/presentationml/2006/main">
   <p:cSld name="Slide 3">
+    <p:bg>
+      <p:bgPr>
+        <a:solidFill>
+          <a:srgbClr val="F3F9F2"/>
+        </a:solidFill>
+      </p:bgPr>
+    </p:bg>
     <p:spTree>
       <p:nvGrpSpPr>
         <p:cNvPr id="1" name=""/>
@@ -2154,43 +2213,96 @@
       </p:grpSpPr>
       <p:sp>
         <p:nvSpPr>
-          <p:cNvPr id="2" name="카드"/>
-          <p:cNvSpPr/>
-          <p:nvPr/>
-        </p:nvSpPr>
-        <p:spPr>
-          <a:xfrm>
-            <a:off x="457200" y="457200"/>
-            <a:ext cx="9774936" cy="6647688"/>
+          <p:cNvPr id="2" name="장식 원"/>
+          <p:cNvSpPr/>
+          <p:nvPr/>
+        </p:nvSpPr>
+        <p:spPr>
+          <a:xfrm>
+            <a:off x="7955280" y="4846320"/>
+            <a:ext cx="4023360" cy="4023360"/>
+          </a:xfrm>
+          <a:prstGeom prst="ellipse">
+            <a:avLst/>
+          </a:prstGeom>
+          <a:solidFill>
+            <a:srgbClr val="D9EBD6">
+              <a:alpha val="70000"/>
+            </a:srgbClr>
+          </a:solidFill>
+          <a:ln/>
+        </p:spPr>
+      </p:sp>
+      <p:sp>
+        <p:nvSpPr>
+          <p:cNvPr id="3" name="장식 원"/>
+          <p:cNvSpPr/>
+          <p:nvPr/>
+        </p:nvSpPr>
+        <p:spPr>
+          <a:xfrm>
+            <a:off x="-1463040" y="-1463040"/>
+            <a:ext cx="2377440" cy="2377440"/>
+          </a:xfrm>
+          <a:prstGeom prst="ellipse">
+            <a:avLst/>
+          </a:prstGeom>
+          <a:solidFill>
+            <a:srgbClr val="D9EBD6">
+              <a:alpha val="60000"/>
+            </a:srgbClr>
+          </a:solidFill>
+          <a:ln/>
+        </p:spPr>
+      </p:sp>
+      <p:sp>
+        <p:nvSpPr>
+          <p:cNvPr id="4" name="카드"/>
+          <p:cNvSpPr/>
+          <p:nvPr/>
+        </p:nvSpPr>
+        <p:spPr>
+          <a:xfrm>
+            <a:off x="822960" y="1005840"/>
+            <a:ext cx="9043416" cy="5577840"/>
           </a:xfrm>
           <a:prstGeom prst="roundRect">
             <a:avLst>
-              <a:gd name="adj" fmla="val 4814"/>
+              <a:gd name="adj" fmla="val 6557"/>
             </a:avLst>
           </a:prstGeom>
           <a:solidFill>
-            <a:schemeClr val="accent3"/>
-          </a:solidFill>
-          <a:ln/>
-        </p:spPr>
-      </p:sp>
-      <p:sp>
-        <p:nvSpPr>
-          <p:cNvPr id="3" name="Text 0"/>
-          <p:cNvSpPr/>
-          <p:nvPr>
-            <p:ph idx="100" type="body" hasCustomPrompt="1"/>
-          </p:nvPr>
-        </p:nvSpPr>
-        <p:spPr>
-          <a:xfrm>
-            <a:off x="822960" y="914400"/>
-            <a:ext cx="9043416" cy="548640"/>
-          </a:xfrm>
-          <a:prstGeom prst="rect">
-            <a:avLst/>
-          </a:prstGeom>
-          <a:noFill/>
+            <a:srgbClr val="FFFFFF"/>
+          </a:solidFill>
+          <a:ln/>
+          <a:effectLst>
+            <a:outerShdw sx="100000" sy="100000" kx="0" ky="0" algn="bl" rotWithShape="0" blurRad="228600" dist="50800" dir="5400000">
+              <a:srgbClr val="000000">
+                <a:alpha val="10000"/>
+              </a:srgbClr>
+            </a:outerShdw>
+          </a:effectLst>
+        </p:spPr>
+      </p:sp>
+      <p:sp>
+        <p:nvSpPr>
+          <p:cNvPr id="5" name="라벨"/>
+          <p:cNvSpPr txBox="1"/>
+          <p:nvPr/>
+        </p:nvSpPr>
+        <p:spPr>
+          <a:xfrm>
+            <a:off x="4201668" y="1417320"/>
+            <a:ext cx="2286000" cy="475488"/>
+          </a:xfrm>
+          <a:prstGeom prst="roundRect">
+            <a:avLst>
+              <a:gd name="adj" fmla="val 50000"/>
+            </a:avLst>
+          </a:prstGeom>
+          <a:solidFill>
+            <a:srgbClr val="D9EBD6"/>
+          </a:solidFill>
           <a:ln/>
         </p:spPr>
         <p:txBody>
@@ -2201,29 +2313,147 @@
               <a:buNone/>
             </a:pPr>
             <a:r>
-              <a:rPr lang="en-US" sz="2200" dirty="0">
+              <a:rPr lang="en-US" sz="1800" dirty="0">
+                <a:solidFill>
+                  <a:srgbClr val="3F6B45"/>
+                </a:solidFill>
+              </a:rPr>
+              <a:t>본교 교원석</a:t>
+            </a:r>
+            <a:endParaRPr lang="en-US" sz="1800" dirty="0"/>
+          </a:p>
+        </p:txBody>
+      </p:sp>
+      <p:sp>
+        <p:nvSpPr>
+          <p:cNvPr id="6" name="장식 원"/>
+          <p:cNvSpPr/>
+          <p:nvPr/>
+        </p:nvSpPr>
+        <p:spPr>
+          <a:xfrm>
+            <a:off x="4681728" y="2331720"/>
+            <a:ext cx="1325880" cy="1325880"/>
+          </a:xfrm>
+          <a:prstGeom prst="ellipse">
+            <a:avLst/>
+          </a:prstGeom>
+          <a:solidFill>
+            <a:srgbClr val="D9EBD6"/>
+          </a:solidFill>
+          <a:ln/>
+        </p:spPr>
+      </p:sp>
+      <p:pic>
+        <p:nvPicPr>
+          <p:cNvPr id="7" name="아이콘" descr="환경분과 아이콘">    </p:cNvPr>
+          <p:cNvPicPr>
+            <a:picLocks noChangeAspect="1"/>
+          </p:cNvPicPr>
+          <p:nvPr/>
+        </p:nvPicPr>
+        <p:blipFill>
+          <a:blip r:embed="rId1"/>
+          <a:stretch>
+            <a:fillRect/>
+          </a:stretch>
+        </p:blipFill>
+        <p:spPr>
+          <a:xfrm>
+            <a:off x="4946904" y="2596896"/>
+            <a:ext cx="795528" cy="795528"/>
+          </a:xfrm>
+          <a:prstGeom prst="rect">
+            <a:avLst/>
+          </a:prstGeom>
+        </p:spPr>
+      </p:pic>
+      <p:sp>
+        <p:nvSpPr>
+          <p:cNvPr id="8" name="분과명"/>
+          <p:cNvSpPr txBox="1"/>
+          <p:nvPr/>
+        </p:nvSpPr>
+        <p:spPr>
+          <a:xfrm>
+            <a:off x="822960" y="3794760"/>
+            <a:ext cx="9043416" cy="2011680"/>
+          </a:xfrm>
+          <a:prstGeom prst="rect">
+            <a:avLst/>
+          </a:prstGeom>
+          <a:noFill/>
+          <a:ln/>
+        </p:spPr>
+        <p:txBody>
+          <a:bodyPr wrap="square" lIns="0" tIns="0" rIns="0" bIns="0" rtlCol="0" anchor="ctr"/>
+          <a:lstStyle/>
+          <a:p>
+            <a:pPr algn="ctr" indent="0" marL="0">
+              <a:buNone/>
+            </a:pPr>
+            <a:r>
+              <a:rPr lang="en-US" sz="13000" b="1" spc="400" kern="0" dirty="0">
+                <a:solidFill>
+                  <a:srgbClr val="3F6B45"/>
+                </a:solidFill>
+              </a:rPr>
+              <a:t>환경분과</a:t>
+            </a:r>
+            <a:endParaRPr lang="en-US" sz="13000" dirty="0"/>
+          </a:p>
+        </p:txBody>
+      </p:sp>
+      <p:sp>
+        <p:nvSpPr>
+          <p:cNvPr id="9" name="Text 0"/>
+          <p:cNvSpPr/>
+          <p:nvPr>
+            <p:ph idx="100" type="body" hasCustomPrompt="1"/>
+          </p:nvPr>
+        </p:nvSpPr>
+        <p:spPr>
+          <a:xfrm>
+            <a:off x="822960" y="384048"/>
+            <a:ext cx="6400800" cy="411480"/>
+          </a:xfrm>
+          <a:prstGeom prst="rect">
+            <a:avLst/>
+          </a:prstGeom>
+          <a:noFill/>
+          <a:ln/>
+        </p:spPr>
+        <p:txBody>
+          <a:bodyPr wrap="square" lIns="0" tIns="0" rIns="0" bIns="0" rtlCol="0" anchor="ctr"/>
+          <a:lstStyle/>
+          <a:p>
+            <a:pPr algn="l" indent="0" marL="0">
+              <a:buNone/>
+            </a:pPr>
+            <a:r>
+              <a:rPr lang="en-US" sz="1400" dirty="0">
                 <a:solidFill>
                   <a:schemeClr val="tx2"/>
                 </a:solidFill>
               </a:rPr>
               <a:t>2026학년도 학교자율시간 연구학교 운영 보고회</a:t>
             </a:r>
-            <a:endParaRPr lang="en-US" sz="2200" dirty="0"/>
-          </a:p>
-        </p:txBody>
-      </p:sp>
-      <p:sp>
-        <p:nvSpPr>
-          <p:cNvPr id="4" name="Text 0"/>
-          <p:cNvSpPr/>
-          <p:nvPr>
-            <p:ph idx="102" type="title" hasCustomPrompt="1"/>
-          </p:nvPr>
-        </p:nvSpPr>
-        <p:spPr>
-          <a:xfrm>
-            <a:off x="822960" y="2560320"/>
-            <a:ext cx="9043416" cy="2377440"/>
+            <a:endParaRPr lang="en-US" sz="1400" dirty="0"/>
+          </a:p>
+        </p:txBody>
+      </p:sp>
+      <p:sp>
+        <p:nvSpPr>
+          <p:cNvPr id="10" name="Text 0"/>
+          <p:cNvSpPr/>
+          <p:nvPr>
+            <p:ph idx="101" type="body" hasCustomPrompt="1"/>
+          </p:nvPr>
+        </p:nvSpPr>
+        <p:spPr>
+          <a:xfrm>
+            <a:off x="7223760" y="384048"/>
+            <a:ext cx="2642616" cy="411480"/>
           </a:xfrm>
           <a:prstGeom prst="rect">
             <a:avLst/>
@@ -2235,56 +2465,18 @@
           <a:bodyPr wrap="square" lIns="0" tIns="0" rIns="0" bIns="0" rtlCol="0" anchor="ctr"/>
           <a:lstStyle/>
           <a:p>
-            <a:pPr algn="ctr" indent="0" marL="0">
+            <a:pPr algn="r" indent="0" marL="0">
               <a:buNone/>
             </a:pPr>
             <a:r>
-              <a:rPr lang="en-US" sz="13000" b="1" dirty="0">
-                <a:solidFill>
-                  <a:schemeClr val="tx1"/>
-                </a:solidFill>
-              </a:rPr>
-              <a:t>환경분과</a:t>
-            </a:r>
-            <a:endParaRPr lang="en-US" sz="13000" dirty="0"/>
-          </a:p>
-        </p:txBody>
-      </p:sp>
-      <p:sp>
-        <p:nvSpPr>
-          <p:cNvPr id="5" name="Text 0"/>
-          <p:cNvSpPr/>
-          <p:nvPr>
-            <p:ph idx="101" type="body" hasCustomPrompt="1"/>
-          </p:nvPr>
-        </p:nvSpPr>
-        <p:spPr>
-          <a:xfrm>
-            <a:off x="822960" y="6172200"/>
-            <a:ext cx="9043416" cy="457200"/>
-          </a:xfrm>
-          <a:prstGeom prst="rect">
-            <a:avLst/>
-          </a:prstGeom>
-          <a:noFill/>
-          <a:ln/>
-        </p:spPr>
-        <p:txBody>
-          <a:bodyPr wrap="square" lIns="0" tIns="0" rIns="0" bIns="0" rtlCol="0" anchor="ctr"/>
-          <a:lstStyle/>
-          <a:p>
-            <a:pPr algn="ctr" indent="0" marL="0">
-              <a:buNone/>
-            </a:pPr>
-            <a:r>
-              <a:rPr lang="en-US" sz="2000" dirty="0">
+              <a:rPr lang="en-US" sz="1400" b="1" dirty="0">
                 <a:solidFill>
                   <a:schemeClr val="tx2"/>
                 </a:solidFill>
               </a:rPr>
               <a:t>광양중동초등학교</a:t>
             </a:r>
-            <a:endParaRPr lang="en-US" sz="2000" dirty="0"/>
+            <a:endParaRPr lang="en-US" sz="1400" dirty="0"/>
           </a:p>
         </p:txBody>
       </p:sp>
@@ -2299,6 +2491,13 @@
 <file path=ppt/slides/slide4.xml><?xml version="1.0" encoding="utf-8"?>
 <p:sld xmlns:a="http://schemas.openxmlformats.org/drawingml/2006/main" xmlns:r="http://schemas.openxmlformats.org/officeDocument/2006/relationships" xmlns:p="http://schemas.openxmlformats.org/presentationml/2006/main">
   <p:cSld name="Slide 4">
+    <p:bg>
+      <p:bgPr>
+        <a:solidFill>
+          <a:srgbClr val="F1F6FC"/>
+        </a:solidFill>
+      </p:bgPr>
+    </p:bg>
     <p:spTree>
       <p:nvGrpSpPr>
         <p:cNvPr id="1" name=""/>
@@ -2315,43 +2514,96 @@
       </p:grpSpPr>
       <p:sp>
         <p:nvSpPr>
-          <p:cNvPr id="2" name="카드"/>
-          <p:cNvSpPr/>
-          <p:nvPr/>
-        </p:nvSpPr>
-        <p:spPr>
-          <a:xfrm>
-            <a:off x="457200" y="457200"/>
-            <a:ext cx="9774936" cy="6647688"/>
+          <p:cNvPr id="2" name="장식 원"/>
+          <p:cNvSpPr/>
+          <p:nvPr/>
+        </p:nvSpPr>
+        <p:spPr>
+          <a:xfrm>
+            <a:off x="7955280" y="4846320"/>
+            <a:ext cx="4023360" cy="4023360"/>
+          </a:xfrm>
+          <a:prstGeom prst="ellipse">
+            <a:avLst/>
+          </a:prstGeom>
+          <a:solidFill>
+            <a:srgbClr val="D6E6F5">
+              <a:alpha val="70000"/>
+            </a:srgbClr>
+          </a:solidFill>
+          <a:ln/>
+        </p:spPr>
+      </p:sp>
+      <p:sp>
+        <p:nvSpPr>
+          <p:cNvPr id="3" name="장식 원"/>
+          <p:cNvSpPr/>
+          <p:nvPr/>
+        </p:nvSpPr>
+        <p:spPr>
+          <a:xfrm>
+            <a:off x="-1463040" y="-1463040"/>
+            <a:ext cx="2377440" cy="2377440"/>
+          </a:xfrm>
+          <a:prstGeom prst="ellipse">
+            <a:avLst/>
+          </a:prstGeom>
+          <a:solidFill>
+            <a:srgbClr val="D6E6F5">
+              <a:alpha val="60000"/>
+            </a:srgbClr>
+          </a:solidFill>
+          <a:ln/>
+        </p:spPr>
+      </p:sp>
+      <p:sp>
+        <p:nvSpPr>
+          <p:cNvPr id="4" name="카드"/>
+          <p:cNvSpPr/>
+          <p:nvPr/>
+        </p:nvSpPr>
+        <p:spPr>
+          <a:xfrm>
+            <a:off x="822960" y="1005840"/>
+            <a:ext cx="9043416" cy="5577840"/>
           </a:xfrm>
           <a:prstGeom prst="roundRect">
             <a:avLst>
-              <a:gd name="adj" fmla="val 4814"/>
+              <a:gd name="adj" fmla="val 6557"/>
             </a:avLst>
           </a:prstGeom>
           <a:solidFill>
-            <a:schemeClr val="accent4"/>
-          </a:solidFill>
-          <a:ln/>
-        </p:spPr>
-      </p:sp>
-      <p:sp>
-        <p:nvSpPr>
-          <p:cNvPr id="3" name="Text 0"/>
-          <p:cNvSpPr/>
-          <p:nvPr>
-            <p:ph idx="100" type="body" hasCustomPrompt="1"/>
-          </p:nvPr>
-        </p:nvSpPr>
-        <p:spPr>
-          <a:xfrm>
-            <a:off x="822960" y="914400"/>
-            <a:ext cx="9043416" cy="548640"/>
-          </a:xfrm>
-          <a:prstGeom prst="rect">
-            <a:avLst/>
-          </a:prstGeom>
-          <a:noFill/>
+            <a:srgbClr val="FFFFFF"/>
+          </a:solidFill>
+          <a:ln/>
+          <a:effectLst>
+            <a:outerShdw sx="100000" sy="100000" kx="0" ky="0" algn="bl" rotWithShape="0" blurRad="228600" dist="50800" dir="5400000">
+              <a:srgbClr val="000000">
+                <a:alpha val="10000"/>
+              </a:srgbClr>
+            </a:outerShdw>
+          </a:effectLst>
+        </p:spPr>
+      </p:sp>
+      <p:sp>
+        <p:nvSpPr>
+          <p:cNvPr id="5" name="라벨"/>
+          <p:cNvSpPr txBox="1"/>
+          <p:nvPr/>
+        </p:nvSpPr>
+        <p:spPr>
+          <a:xfrm>
+            <a:off x="4201668" y="1417320"/>
+            <a:ext cx="2286000" cy="475488"/>
+          </a:xfrm>
+          <a:prstGeom prst="roundRect">
+            <a:avLst>
+              <a:gd name="adj" fmla="val 50000"/>
+            </a:avLst>
+          </a:prstGeom>
+          <a:solidFill>
+            <a:srgbClr val="D6E6F5"/>
+          </a:solidFill>
           <a:ln/>
         </p:spPr>
         <p:txBody>
@@ -2362,29 +2614,187 @@
               <a:buNone/>
             </a:pPr>
             <a:r>
-              <a:rPr lang="en-US" sz="2200" dirty="0">
+              <a:rPr lang="en-US" sz="1800" dirty="0">
+                <a:solidFill>
+                  <a:srgbClr val="2F5D8A"/>
+                </a:solidFill>
+              </a:rPr>
+              <a:t>본교 교원석</a:t>
+            </a:r>
+            <a:endParaRPr lang="en-US" sz="1800" dirty="0"/>
+          </a:p>
+        </p:txBody>
+      </p:sp>
+      <p:sp>
+        <p:nvSpPr>
+          <p:cNvPr id="6" name="장식 원"/>
+          <p:cNvSpPr/>
+          <p:nvPr/>
+        </p:nvSpPr>
+        <p:spPr>
+          <a:xfrm>
+            <a:off x="4773168" y="2148840"/>
+            <a:ext cx="1143000" cy="1143000"/>
+          </a:xfrm>
+          <a:prstGeom prst="ellipse">
+            <a:avLst/>
+          </a:prstGeom>
+          <a:solidFill>
+            <a:srgbClr val="D6E6F5"/>
+          </a:solidFill>
+          <a:ln/>
+        </p:spPr>
+      </p:sp>
+      <p:pic>
+        <p:nvPicPr>
+          <p:cNvPr id="7" name="아이콘" descr="수업분과 아이콘">    </p:cNvPr>
+          <p:cNvPicPr>
+            <a:picLocks noChangeAspect="1"/>
+          </p:cNvPicPr>
+          <p:nvPr/>
+        </p:nvPicPr>
+        <p:blipFill>
+          <a:blip r:embed="rId1"/>
+          <a:stretch>
+            <a:fillRect/>
+          </a:stretch>
+        </p:blipFill>
+        <p:spPr>
+          <a:xfrm>
+            <a:off x="5001768" y="2377440"/>
+            <a:ext cx="685800" cy="685800"/>
+          </a:xfrm>
+          <a:prstGeom prst="rect">
+            <a:avLst/>
+          </a:prstGeom>
+        </p:spPr>
+      </p:pic>
+      <p:sp>
+        <p:nvSpPr>
+          <p:cNvPr id="8" name="분과명"/>
+          <p:cNvSpPr txBox="1"/>
+          <p:nvPr/>
+        </p:nvSpPr>
+        <p:spPr>
+          <a:xfrm>
+            <a:off x="822960" y="3383280"/>
+            <a:ext cx="9043416" cy="1600200"/>
+          </a:xfrm>
+          <a:prstGeom prst="rect">
+            <a:avLst/>
+          </a:prstGeom>
+          <a:noFill/>
+          <a:ln/>
+        </p:spPr>
+        <p:txBody>
+          <a:bodyPr wrap="square" lIns="0" tIns="0" rIns="0" bIns="0" rtlCol="0" anchor="ctr"/>
+          <a:lstStyle/>
+          <a:p>
+            <a:pPr algn="ctr" indent="0" marL="0">
+              <a:buNone/>
+            </a:pPr>
+            <a:r>
+              <a:rPr lang="en-US" sz="11000" b="1" spc="400" kern="0" dirty="0">
+                <a:solidFill>
+                  <a:srgbClr val="2F5D8A"/>
+                </a:solidFill>
+              </a:rPr>
+              <a:t>수업분과</a:t>
+            </a:r>
+            <a:endParaRPr lang="en-US" sz="11000" dirty="0"/>
+          </a:p>
+        </p:txBody>
+      </p:sp>
+      <p:sp>
+        <p:nvSpPr>
+          <p:cNvPr id="9" name="라벨"/>
+          <p:cNvSpPr txBox="1"/>
+          <p:nvPr/>
+        </p:nvSpPr>
+        <p:spPr>
+          <a:xfrm>
+            <a:off x="3607308" y="5166360"/>
+            <a:ext cx="3474720" cy="914400"/>
+          </a:xfrm>
+          <a:prstGeom prst="roundRect">
+            <a:avLst>
+              <a:gd name="adj" fmla="val 50000"/>
+            </a:avLst>
+          </a:prstGeom>
+          <a:solidFill>
+            <a:srgbClr val="2F5D8A"/>
+          </a:solidFill>
+          <a:ln/>
+        </p:spPr>
+        <p:txBody>
+          <a:bodyPr wrap="square" lIns="0" tIns="0" rIns="0" bIns="0" rtlCol="0" anchor="ctr"/>
+          <a:lstStyle/>
+          <a:p>
+            <a:pPr algn="ctr" indent="0" marL="0">
+              <a:buNone/>
+            </a:pPr>
+            <a:r>
+              <a:rPr lang="en-US" sz="5000" b="1" dirty="0">
+                <a:solidFill>
+                  <a:srgbClr val="FFFFFF"/>
+                </a:solidFill>
+              </a:rPr>
+              <a:t>1·2학년</a:t>
+            </a:r>
+            <a:endParaRPr lang="en-US" sz="5000" dirty="0"/>
+          </a:p>
+        </p:txBody>
+      </p:sp>
+      <p:sp>
+        <p:nvSpPr>
+          <p:cNvPr id="10" name="Text 0"/>
+          <p:cNvSpPr/>
+          <p:nvPr>
+            <p:ph idx="100" type="body" hasCustomPrompt="1"/>
+          </p:nvPr>
+        </p:nvSpPr>
+        <p:spPr>
+          <a:xfrm>
+            <a:off x="822960" y="384048"/>
+            <a:ext cx="6400800" cy="411480"/>
+          </a:xfrm>
+          <a:prstGeom prst="rect">
+            <a:avLst/>
+          </a:prstGeom>
+          <a:noFill/>
+          <a:ln/>
+        </p:spPr>
+        <p:txBody>
+          <a:bodyPr wrap="square" lIns="0" tIns="0" rIns="0" bIns="0" rtlCol="0" anchor="ctr"/>
+          <a:lstStyle/>
+          <a:p>
+            <a:pPr algn="l" indent="0" marL="0">
+              <a:buNone/>
+            </a:pPr>
+            <a:r>
+              <a:rPr lang="en-US" sz="1400" dirty="0">
                 <a:solidFill>
                   <a:schemeClr val="tx2"/>
                 </a:solidFill>
               </a:rPr>
               <a:t>2026학년도 학교자율시간 연구학교 운영 보고회</a:t>
             </a:r>
-            <a:endParaRPr lang="en-US" sz="2200" dirty="0"/>
-          </a:p>
-        </p:txBody>
-      </p:sp>
-      <p:sp>
-        <p:nvSpPr>
-          <p:cNvPr id="4" name="Text 0"/>
-          <p:cNvSpPr/>
-          <p:nvPr>
-            <p:ph idx="102" type="title" hasCustomPrompt="1"/>
-          </p:nvPr>
-        </p:nvSpPr>
-        <p:spPr>
-          <a:xfrm>
-            <a:off x="822960" y="1737360"/>
-            <a:ext cx="9043416" cy="2377440"/>
+            <a:endParaRPr lang="en-US" sz="1400" dirty="0"/>
+          </a:p>
+        </p:txBody>
+      </p:sp>
+      <p:sp>
+        <p:nvSpPr>
+          <p:cNvPr id="11" name="Text 0"/>
+          <p:cNvSpPr/>
+          <p:nvPr>
+            <p:ph idx="101" type="body" hasCustomPrompt="1"/>
+          </p:nvPr>
+        </p:nvSpPr>
+        <p:spPr>
+          <a:xfrm>
+            <a:off x="7223760" y="384048"/>
+            <a:ext cx="2642616" cy="411480"/>
           </a:xfrm>
           <a:prstGeom prst="rect">
             <a:avLst/>
@@ -2396,94 +2806,18 @@
           <a:bodyPr wrap="square" lIns="0" tIns="0" rIns="0" bIns="0" rtlCol="0" anchor="ctr"/>
           <a:lstStyle/>
           <a:p>
-            <a:pPr algn="ctr" indent="0" marL="0">
+            <a:pPr algn="r" indent="0" marL="0">
               <a:buNone/>
             </a:pPr>
             <a:r>
-              <a:rPr lang="en-US" sz="13000" b="1" dirty="0">
-                <a:solidFill>
-                  <a:schemeClr val="tx1"/>
-                </a:solidFill>
-              </a:rPr>
-              <a:t>수업분과</a:t>
-            </a:r>
-            <a:endParaRPr lang="en-US" sz="13000" dirty="0"/>
-          </a:p>
-        </p:txBody>
-      </p:sp>
-      <p:sp>
-        <p:nvSpPr>
-          <p:cNvPr id="5" name="Text 0"/>
-          <p:cNvSpPr/>
-          <p:nvPr>
-            <p:ph idx="103" type="body" hasCustomPrompt="1"/>
-          </p:nvPr>
-        </p:nvSpPr>
-        <p:spPr>
-          <a:xfrm>
-            <a:off x="822960" y="4480560"/>
-            <a:ext cx="9043416" cy="1371600"/>
-          </a:xfrm>
-          <a:prstGeom prst="rect">
-            <a:avLst/>
-          </a:prstGeom>
-          <a:noFill/>
-          <a:ln/>
-        </p:spPr>
-        <p:txBody>
-          <a:bodyPr wrap="square" lIns="0" tIns="0" rIns="0" bIns="0" rtlCol="0" anchor="ctr"/>
-          <a:lstStyle/>
-          <a:p>
-            <a:pPr algn="ctr" indent="0" marL="0">
-              <a:buNone/>
-            </a:pPr>
-            <a:r>
-              <a:rPr lang="en-US" sz="8000" b="1" dirty="0">
-                <a:solidFill>
-                  <a:schemeClr val="tx1"/>
-                </a:solidFill>
-              </a:rPr>
-              <a:t>1·2학년</a:t>
-            </a:r>
-            <a:endParaRPr lang="en-US" sz="8000" dirty="0"/>
-          </a:p>
-        </p:txBody>
-      </p:sp>
-      <p:sp>
-        <p:nvSpPr>
-          <p:cNvPr id="6" name="Text 0"/>
-          <p:cNvSpPr/>
-          <p:nvPr>
-            <p:ph idx="101" type="body" hasCustomPrompt="1"/>
-          </p:nvPr>
-        </p:nvSpPr>
-        <p:spPr>
-          <a:xfrm>
-            <a:off x="822960" y="6172200"/>
-            <a:ext cx="9043416" cy="457200"/>
-          </a:xfrm>
-          <a:prstGeom prst="rect">
-            <a:avLst/>
-          </a:prstGeom>
-          <a:noFill/>
-          <a:ln/>
-        </p:spPr>
-        <p:txBody>
-          <a:bodyPr wrap="square" lIns="0" tIns="0" rIns="0" bIns="0" rtlCol="0" anchor="ctr"/>
-          <a:lstStyle/>
-          <a:p>
-            <a:pPr algn="ctr" indent="0" marL="0">
-              <a:buNone/>
-            </a:pPr>
-            <a:r>
-              <a:rPr lang="en-US" sz="2000" dirty="0">
+              <a:rPr lang="en-US" sz="1400" b="1" dirty="0">
                 <a:solidFill>
                   <a:schemeClr val="tx2"/>
                 </a:solidFill>
               </a:rPr>
               <a:t>광양중동초등학교</a:t>
             </a:r>
-            <a:endParaRPr lang="en-US" sz="2000" dirty="0"/>
+            <a:endParaRPr lang="en-US" sz="1400" dirty="0"/>
           </a:p>
         </p:txBody>
       </p:sp>
@@ -2498,6 +2832,13 @@
 <file path=ppt/slides/slide5.xml><?xml version="1.0" encoding="utf-8"?>
 <p:sld xmlns:a="http://schemas.openxmlformats.org/drawingml/2006/main" xmlns:r="http://schemas.openxmlformats.org/officeDocument/2006/relationships" xmlns:p="http://schemas.openxmlformats.org/presentationml/2006/main">
   <p:cSld name="Slide 5">
+    <p:bg>
+      <p:bgPr>
+        <a:solidFill>
+          <a:srgbClr val="F1F6FC"/>
+        </a:solidFill>
+      </p:bgPr>
+    </p:bg>
     <p:spTree>
       <p:nvGrpSpPr>
         <p:cNvPr id="1" name=""/>
@@ -2514,43 +2855,96 @@
       </p:grpSpPr>
       <p:sp>
         <p:nvSpPr>
-          <p:cNvPr id="2" name="카드"/>
-          <p:cNvSpPr/>
-          <p:nvPr/>
-        </p:nvSpPr>
-        <p:spPr>
-          <a:xfrm>
-            <a:off x="457200" y="457200"/>
-            <a:ext cx="9774936" cy="6647688"/>
+          <p:cNvPr id="2" name="장식 원"/>
+          <p:cNvSpPr/>
+          <p:nvPr/>
+        </p:nvSpPr>
+        <p:spPr>
+          <a:xfrm>
+            <a:off x="7955280" y="4846320"/>
+            <a:ext cx="4023360" cy="4023360"/>
+          </a:xfrm>
+          <a:prstGeom prst="ellipse">
+            <a:avLst/>
+          </a:prstGeom>
+          <a:solidFill>
+            <a:srgbClr val="D6E6F5">
+              <a:alpha val="70000"/>
+            </a:srgbClr>
+          </a:solidFill>
+          <a:ln/>
+        </p:spPr>
+      </p:sp>
+      <p:sp>
+        <p:nvSpPr>
+          <p:cNvPr id="3" name="장식 원"/>
+          <p:cNvSpPr/>
+          <p:nvPr/>
+        </p:nvSpPr>
+        <p:spPr>
+          <a:xfrm>
+            <a:off x="-1463040" y="-1463040"/>
+            <a:ext cx="2377440" cy="2377440"/>
+          </a:xfrm>
+          <a:prstGeom prst="ellipse">
+            <a:avLst/>
+          </a:prstGeom>
+          <a:solidFill>
+            <a:srgbClr val="D6E6F5">
+              <a:alpha val="60000"/>
+            </a:srgbClr>
+          </a:solidFill>
+          <a:ln/>
+        </p:spPr>
+      </p:sp>
+      <p:sp>
+        <p:nvSpPr>
+          <p:cNvPr id="4" name="카드"/>
+          <p:cNvSpPr/>
+          <p:nvPr/>
+        </p:nvSpPr>
+        <p:spPr>
+          <a:xfrm>
+            <a:off x="822960" y="1005840"/>
+            <a:ext cx="9043416" cy="5577840"/>
           </a:xfrm>
           <a:prstGeom prst="roundRect">
             <a:avLst>
-              <a:gd name="adj" fmla="val 4814"/>
+              <a:gd name="adj" fmla="val 6557"/>
             </a:avLst>
           </a:prstGeom>
           <a:solidFill>
-            <a:schemeClr val="accent4"/>
-          </a:solidFill>
-          <a:ln/>
-        </p:spPr>
-      </p:sp>
-      <p:sp>
-        <p:nvSpPr>
-          <p:cNvPr id="3" name="Text 0"/>
-          <p:cNvSpPr/>
-          <p:nvPr>
-            <p:ph idx="100" type="body" hasCustomPrompt="1"/>
-          </p:nvPr>
-        </p:nvSpPr>
-        <p:spPr>
-          <a:xfrm>
-            <a:off x="822960" y="914400"/>
-            <a:ext cx="9043416" cy="548640"/>
-          </a:xfrm>
-          <a:prstGeom prst="rect">
-            <a:avLst/>
-          </a:prstGeom>
-          <a:noFill/>
+            <a:srgbClr val="FFFFFF"/>
+          </a:solidFill>
+          <a:ln/>
+          <a:effectLst>
+            <a:outerShdw sx="100000" sy="100000" kx="0" ky="0" algn="bl" rotWithShape="0" blurRad="228600" dist="50800" dir="5400000">
+              <a:srgbClr val="000000">
+                <a:alpha val="10000"/>
+              </a:srgbClr>
+            </a:outerShdw>
+          </a:effectLst>
+        </p:spPr>
+      </p:sp>
+      <p:sp>
+        <p:nvSpPr>
+          <p:cNvPr id="5" name="라벨"/>
+          <p:cNvSpPr txBox="1"/>
+          <p:nvPr/>
+        </p:nvSpPr>
+        <p:spPr>
+          <a:xfrm>
+            <a:off x="4201668" y="1417320"/>
+            <a:ext cx="2286000" cy="475488"/>
+          </a:xfrm>
+          <a:prstGeom prst="roundRect">
+            <a:avLst>
+              <a:gd name="adj" fmla="val 50000"/>
+            </a:avLst>
+          </a:prstGeom>
+          <a:solidFill>
+            <a:srgbClr val="D6E6F5"/>
+          </a:solidFill>
           <a:ln/>
         </p:spPr>
         <p:txBody>
@@ -2561,29 +2955,187 @@
               <a:buNone/>
             </a:pPr>
             <a:r>
-              <a:rPr lang="en-US" sz="2200" dirty="0">
+              <a:rPr lang="en-US" sz="1800" dirty="0">
+                <a:solidFill>
+                  <a:srgbClr val="2F5D8A"/>
+                </a:solidFill>
+              </a:rPr>
+              <a:t>본교 교원석</a:t>
+            </a:r>
+            <a:endParaRPr lang="en-US" sz="1800" dirty="0"/>
+          </a:p>
+        </p:txBody>
+      </p:sp>
+      <p:sp>
+        <p:nvSpPr>
+          <p:cNvPr id="6" name="장식 원"/>
+          <p:cNvSpPr/>
+          <p:nvPr/>
+        </p:nvSpPr>
+        <p:spPr>
+          <a:xfrm>
+            <a:off x="4773168" y="2148840"/>
+            <a:ext cx="1143000" cy="1143000"/>
+          </a:xfrm>
+          <a:prstGeom prst="ellipse">
+            <a:avLst/>
+          </a:prstGeom>
+          <a:solidFill>
+            <a:srgbClr val="D6E6F5"/>
+          </a:solidFill>
+          <a:ln/>
+        </p:spPr>
+      </p:sp>
+      <p:pic>
+        <p:nvPicPr>
+          <p:cNvPr id="7" name="아이콘" descr="수업분과 아이콘">    </p:cNvPr>
+          <p:cNvPicPr>
+            <a:picLocks noChangeAspect="1"/>
+          </p:cNvPicPr>
+          <p:nvPr/>
+        </p:nvPicPr>
+        <p:blipFill>
+          <a:blip r:embed="rId1"/>
+          <a:stretch>
+            <a:fillRect/>
+          </a:stretch>
+        </p:blipFill>
+        <p:spPr>
+          <a:xfrm>
+            <a:off x="5001768" y="2377440"/>
+            <a:ext cx="685800" cy="685800"/>
+          </a:xfrm>
+          <a:prstGeom prst="rect">
+            <a:avLst/>
+          </a:prstGeom>
+        </p:spPr>
+      </p:pic>
+      <p:sp>
+        <p:nvSpPr>
+          <p:cNvPr id="8" name="분과명"/>
+          <p:cNvSpPr txBox="1"/>
+          <p:nvPr/>
+        </p:nvSpPr>
+        <p:spPr>
+          <a:xfrm>
+            <a:off x="822960" y="3383280"/>
+            <a:ext cx="9043416" cy="1600200"/>
+          </a:xfrm>
+          <a:prstGeom prst="rect">
+            <a:avLst/>
+          </a:prstGeom>
+          <a:noFill/>
+          <a:ln/>
+        </p:spPr>
+        <p:txBody>
+          <a:bodyPr wrap="square" lIns="0" tIns="0" rIns="0" bIns="0" rtlCol="0" anchor="ctr"/>
+          <a:lstStyle/>
+          <a:p>
+            <a:pPr algn="ctr" indent="0" marL="0">
+              <a:buNone/>
+            </a:pPr>
+            <a:r>
+              <a:rPr lang="en-US" sz="11000" b="1" spc="400" kern="0" dirty="0">
+                <a:solidFill>
+                  <a:srgbClr val="2F5D8A"/>
+                </a:solidFill>
+              </a:rPr>
+              <a:t>수업분과</a:t>
+            </a:r>
+            <a:endParaRPr lang="en-US" sz="11000" dirty="0"/>
+          </a:p>
+        </p:txBody>
+      </p:sp>
+      <p:sp>
+        <p:nvSpPr>
+          <p:cNvPr id="9" name="라벨"/>
+          <p:cNvSpPr txBox="1"/>
+          <p:nvPr/>
+        </p:nvSpPr>
+        <p:spPr>
+          <a:xfrm>
+            <a:off x="3607308" y="5166360"/>
+            <a:ext cx="3474720" cy="914400"/>
+          </a:xfrm>
+          <a:prstGeom prst="roundRect">
+            <a:avLst>
+              <a:gd name="adj" fmla="val 50000"/>
+            </a:avLst>
+          </a:prstGeom>
+          <a:solidFill>
+            <a:srgbClr val="2F5D8A"/>
+          </a:solidFill>
+          <a:ln/>
+        </p:spPr>
+        <p:txBody>
+          <a:bodyPr wrap="square" lIns="0" tIns="0" rIns="0" bIns="0" rtlCol="0" anchor="ctr"/>
+          <a:lstStyle/>
+          <a:p>
+            <a:pPr algn="ctr" indent="0" marL="0">
+              <a:buNone/>
+            </a:pPr>
+            <a:r>
+              <a:rPr lang="en-US" sz="5000" b="1" dirty="0">
+                <a:solidFill>
+                  <a:srgbClr val="FFFFFF"/>
+                </a:solidFill>
+              </a:rPr>
+              <a:t>3학년</a:t>
+            </a:r>
+            <a:endParaRPr lang="en-US" sz="5000" dirty="0"/>
+          </a:p>
+        </p:txBody>
+      </p:sp>
+      <p:sp>
+        <p:nvSpPr>
+          <p:cNvPr id="10" name="Text 0"/>
+          <p:cNvSpPr/>
+          <p:nvPr>
+            <p:ph idx="100" type="body" hasCustomPrompt="1"/>
+          </p:nvPr>
+        </p:nvSpPr>
+        <p:spPr>
+          <a:xfrm>
+            <a:off x="822960" y="384048"/>
+            <a:ext cx="6400800" cy="411480"/>
+          </a:xfrm>
+          <a:prstGeom prst="rect">
+            <a:avLst/>
+          </a:prstGeom>
+          <a:noFill/>
+          <a:ln/>
+        </p:spPr>
+        <p:txBody>
+          <a:bodyPr wrap="square" lIns="0" tIns="0" rIns="0" bIns="0" rtlCol="0" anchor="ctr"/>
+          <a:lstStyle/>
+          <a:p>
+            <a:pPr algn="l" indent="0" marL="0">
+              <a:buNone/>
+            </a:pPr>
+            <a:r>
+              <a:rPr lang="en-US" sz="1400" dirty="0">
                 <a:solidFill>
                   <a:schemeClr val="tx2"/>
                 </a:solidFill>
               </a:rPr>
               <a:t>2026학년도 학교자율시간 연구학교 운영 보고회</a:t>
             </a:r>
-            <a:endParaRPr lang="en-US" sz="2200" dirty="0"/>
-          </a:p>
-        </p:txBody>
-      </p:sp>
-      <p:sp>
-        <p:nvSpPr>
-          <p:cNvPr id="4" name="Text 0"/>
-          <p:cNvSpPr/>
-          <p:nvPr>
-            <p:ph idx="102" type="title" hasCustomPrompt="1"/>
-          </p:nvPr>
-        </p:nvSpPr>
-        <p:spPr>
-          <a:xfrm>
-            <a:off x="822960" y="1737360"/>
-            <a:ext cx="9043416" cy="2377440"/>
+            <a:endParaRPr lang="en-US" sz="1400" dirty="0"/>
+          </a:p>
+        </p:txBody>
+      </p:sp>
+      <p:sp>
+        <p:nvSpPr>
+          <p:cNvPr id="11" name="Text 0"/>
+          <p:cNvSpPr/>
+          <p:nvPr>
+            <p:ph idx="101" type="body" hasCustomPrompt="1"/>
+          </p:nvPr>
+        </p:nvSpPr>
+        <p:spPr>
+          <a:xfrm>
+            <a:off x="7223760" y="384048"/>
+            <a:ext cx="2642616" cy="411480"/>
           </a:xfrm>
           <a:prstGeom prst="rect">
             <a:avLst/>
@@ -2595,94 +3147,18 @@
           <a:bodyPr wrap="square" lIns="0" tIns="0" rIns="0" bIns="0" rtlCol="0" anchor="ctr"/>
           <a:lstStyle/>
           <a:p>
-            <a:pPr algn="ctr" indent="0" marL="0">
+            <a:pPr algn="r" indent="0" marL="0">
               <a:buNone/>
             </a:pPr>
             <a:r>
-              <a:rPr lang="en-US" sz="13000" b="1" dirty="0">
-                <a:solidFill>
-                  <a:schemeClr val="tx1"/>
-                </a:solidFill>
-              </a:rPr>
-              <a:t>수업분과</a:t>
-            </a:r>
-            <a:endParaRPr lang="en-US" sz="13000" dirty="0"/>
-          </a:p>
-        </p:txBody>
-      </p:sp>
-      <p:sp>
-        <p:nvSpPr>
-          <p:cNvPr id="5" name="Text 0"/>
-          <p:cNvSpPr/>
-          <p:nvPr>
-            <p:ph idx="103" type="body" hasCustomPrompt="1"/>
-          </p:nvPr>
-        </p:nvSpPr>
-        <p:spPr>
-          <a:xfrm>
-            <a:off x="822960" y="4480560"/>
-            <a:ext cx="9043416" cy="1371600"/>
-          </a:xfrm>
-          <a:prstGeom prst="rect">
-            <a:avLst/>
-          </a:prstGeom>
-          <a:noFill/>
-          <a:ln/>
-        </p:spPr>
-        <p:txBody>
-          <a:bodyPr wrap="square" lIns="0" tIns="0" rIns="0" bIns="0" rtlCol="0" anchor="ctr"/>
-          <a:lstStyle/>
-          <a:p>
-            <a:pPr algn="ctr" indent="0" marL="0">
-              <a:buNone/>
-            </a:pPr>
-            <a:r>
-              <a:rPr lang="en-US" sz="8000" b="1" dirty="0">
-                <a:solidFill>
-                  <a:schemeClr val="tx1"/>
-                </a:solidFill>
-              </a:rPr>
-              <a:t>3학년</a:t>
-            </a:r>
-            <a:endParaRPr lang="en-US" sz="8000" dirty="0"/>
-          </a:p>
-        </p:txBody>
-      </p:sp>
-      <p:sp>
-        <p:nvSpPr>
-          <p:cNvPr id="6" name="Text 0"/>
-          <p:cNvSpPr/>
-          <p:nvPr>
-            <p:ph idx="101" type="body" hasCustomPrompt="1"/>
-          </p:nvPr>
-        </p:nvSpPr>
-        <p:spPr>
-          <a:xfrm>
-            <a:off x="822960" y="6172200"/>
-            <a:ext cx="9043416" cy="457200"/>
-          </a:xfrm>
-          <a:prstGeom prst="rect">
-            <a:avLst/>
-          </a:prstGeom>
-          <a:noFill/>
-          <a:ln/>
-        </p:spPr>
-        <p:txBody>
-          <a:bodyPr wrap="square" lIns="0" tIns="0" rIns="0" bIns="0" rtlCol="0" anchor="ctr"/>
-          <a:lstStyle/>
-          <a:p>
-            <a:pPr algn="ctr" indent="0" marL="0">
-              <a:buNone/>
-            </a:pPr>
-            <a:r>
-              <a:rPr lang="en-US" sz="2000" dirty="0">
+              <a:rPr lang="en-US" sz="1400" b="1" dirty="0">
                 <a:solidFill>
                   <a:schemeClr val="tx2"/>
                 </a:solidFill>
               </a:rPr>
               <a:t>광양중동초등학교</a:t>
             </a:r>
-            <a:endParaRPr lang="en-US" sz="2000" dirty="0"/>
+            <a:endParaRPr lang="en-US" sz="1400" dirty="0"/>
           </a:p>
         </p:txBody>
       </p:sp>
@@ -2697,6 +3173,13 @@
 <file path=ppt/slides/slide6.xml><?xml version="1.0" encoding="utf-8"?>
 <p:sld xmlns:a="http://schemas.openxmlformats.org/drawingml/2006/main" xmlns:r="http://schemas.openxmlformats.org/officeDocument/2006/relationships" xmlns:p="http://schemas.openxmlformats.org/presentationml/2006/main">
   <p:cSld name="Slide 6">
+    <p:bg>
+      <p:bgPr>
+        <a:solidFill>
+          <a:srgbClr val="F1F6FC"/>
+        </a:solidFill>
+      </p:bgPr>
+    </p:bg>
     <p:spTree>
       <p:nvGrpSpPr>
         <p:cNvPr id="1" name=""/>
@@ -2713,43 +3196,96 @@
       </p:grpSpPr>
       <p:sp>
         <p:nvSpPr>
-          <p:cNvPr id="2" name="카드"/>
-          <p:cNvSpPr/>
-          <p:nvPr/>
-        </p:nvSpPr>
-        <p:spPr>
-          <a:xfrm>
-            <a:off x="457200" y="457200"/>
-            <a:ext cx="9774936" cy="6647688"/>
+          <p:cNvPr id="2" name="장식 원"/>
+          <p:cNvSpPr/>
+          <p:nvPr/>
+        </p:nvSpPr>
+        <p:spPr>
+          <a:xfrm>
+            <a:off x="7955280" y="4846320"/>
+            <a:ext cx="4023360" cy="4023360"/>
+          </a:xfrm>
+          <a:prstGeom prst="ellipse">
+            <a:avLst/>
+          </a:prstGeom>
+          <a:solidFill>
+            <a:srgbClr val="D6E6F5">
+              <a:alpha val="70000"/>
+            </a:srgbClr>
+          </a:solidFill>
+          <a:ln/>
+        </p:spPr>
+      </p:sp>
+      <p:sp>
+        <p:nvSpPr>
+          <p:cNvPr id="3" name="장식 원"/>
+          <p:cNvSpPr/>
+          <p:nvPr/>
+        </p:nvSpPr>
+        <p:spPr>
+          <a:xfrm>
+            <a:off x="-1463040" y="-1463040"/>
+            <a:ext cx="2377440" cy="2377440"/>
+          </a:xfrm>
+          <a:prstGeom prst="ellipse">
+            <a:avLst/>
+          </a:prstGeom>
+          <a:solidFill>
+            <a:srgbClr val="D6E6F5">
+              <a:alpha val="60000"/>
+            </a:srgbClr>
+          </a:solidFill>
+          <a:ln/>
+        </p:spPr>
+      </p:sp>
+      <p:sp>
+        <p:nvSpPr>
+          <p:cNvPr id="4" name="카드"/>
+          <p:cNvSpPr/>
+          <p:nvPr/>
+        </p:nvSpPr>
+        <p:spPr>
+          <a:xfrm>
+            <a:off x="822960" y="1005840"/>
+            <a:ext cx="9043416" cy="5577840"/>
           </a:xfrm>
           <a:prstGeom prst="roundRect">
             <a:avLst>
-              <a:gd name="adj" fmla="val 4814"/>
+              <a:gd name="adj" fmla="val 6557"/>
             </a:avLst>
           </a:prstGeom>
           <a:solidFill>
-            <a:schemeClr val="accent4"/>
-          </a:solidFill>
-          <a:ln/>
-        </p:spPr>
-      </p:sp>
-      <p:sp>
-        <p:nvSpPr>
-          <p:cNvPr id="3" name="Text 0"/>
-          <p:cNvSpPr/>
-          <p:nvPr>
-            <p:ph idx="100" type="body" hasCustomPrompt="1"/>
-          </p:nvPr>
-        </p:nvSpPr>
-        <p:spPr>
-          <a:xfrm>
-            <a:off x="822960" y="914400"/>
-            <a:ext cx="9043416" cy="548640"/>
-          </a:xfrm>
-          <a:prstGeom prst="rect">
-            <a:avLst/>
-          </a:prstGeom>
-          <a:noFill/>
+            <a:srgbClr val="FFFFFF"/>
+          </a:solidFill>
+          <a:ln/>
+          <a:effectLst>
+            <a:outerShdw sx="100000" sy="100000" kx="0" ky="0" algn="bl" rotWithShape="0" blurRad="228600" dist="50800" dir="5400000">
+              <a:srgbClr val="000000">
+                <a:alpha val="10000"/>
+              </a:srgbClr>
+            </a:outerShdw>
+          </a:effectLst>
+        </p:spPr>
+      </p:sp>
+      <p:sp>
+        <p:nvSpPr>
+          <p:cNvPr id="5" name="라벨"/>
+          <p:cNvSpPr txBox="1"/>
+          <p:nvPr/>
+        </p:nvSpPr>
+        <p:spPr>
+          <a:xfrm>
+            <a:off x="4201668" y="1417320"/>
+            <a:ext cx="2286000" cy="475488"/>
+          </a:xfrm>
+          <a:prstGeom prst="roundRect">
+            <a:avLst>
+              <a:gd name="adj" fmla="val 50000"/>
+            </a:avLst>
+          </a:prstGeom>
+          <a:solidFill>
+            <a:srgbClr val="D6E6F5"/>
+          </a:solidFill>
           <a:ln/>
         </p:spPr>
         <p:txBody>
@@ -2760,29 +3296,187 @@
               <a:buNone/>
             </a:pPr>
             <a:r>
-              <a:rPr lang="en-US" sz="2200" dirty="0">
+              <a:rPr lang="en-US" sz="1800" dirty="0">
+                <a:solidFill>
+                  <a:srgbClr val="2F5D8A"/>
+                </a:solidFill>
+              </a:rPr>
+              <a:t>본교 교원석</a:t>
+            </a:r>
+            <a:endParaRPr lang="en-US" sz="1800" dirty="0"/>
+          </a:p>
+        </p:txBody>
+      </p:sp>
+      <p:sp>
+        <p:nvSpPr>
+          <p:cNvPr id="6" name="장식 원"/>
+          <p:cNvSpPr/>
+          <p:nvPr/>
+        </p:nvSpPr>
+        <p:spPr>
+          <a:xfrm>
+            <a:off x="4773168" y="2148840"/>
+            <a:ext cx="1143000" cy="1143000"/>
+          </a:xfrm>
+          <a:prstGeom prst="ellipse">
+            <a:avLst/>
+          </a:prstGeom>
+          <a:solidFill>
+            <a:srgbClr val="D6E6F5"/>
+          </a:solidFill>
+          <a:ln/>
+        </p:spPr>
+      </p:sp>
+      <p:pic>
+        <p:nvPicPr>
+          <p:cNvPr id="7" name="아이콘" descr="수업분과 아이콘">    </p:cNvPr>
+          <p:cNvPicPr>
+            <a:picLocks noChangeAspect="1"/>
+          </p:cNvPicPr>
+          <p:nvPr/>
+        </p:nvPicPr>
+        <p:blipFill>
+          <a:blip r:embed="rId1"/>
+          <a:stretch>
+            <a:fillRect/>
+          </a:stretch>
+        </p:blipFill>
+        <p:spPr>
+          <a:xfrm>
+            <a:off x="5001768" y="2377440"/>
+            <a:ext cx="685800" cy="685800"/>
+          </a:xfrm>
+          <a:prstGeom prst="rect">
+            <a:avLst/>
+          </a:prstGeom>
+        </p:spPr>
+      </p:pic>
+      <p:sp>
+        <p:nvSpPr>
+          <p:cNvPr id="8" name="분과명"/>
+          <p:cNvSpPr txBox="1"/>
+          <p:nvPr/>
+        </p:nvSpPr>
+        <p:spPr>
+          <a:xfrm>
+            <a:off x="822960" y="3383280"/>
+            <a:ext cx="9043416" cy="1600200"/>
+          </a:xfrm>
+          <a:prstGeom prst="rect">
+            <a:avLst/>
+          </a:prstGeom>
+          <a:noFill/>
+          <a:ln/>
+        </p:spPr>
+        <p:txBody>
+          <a:bodyPr wrap="square" lIns="0" tIns="0" rIns="0" bIns="0" rtlCol="0" anchor="ctr"/>
+          <a:lstStyle/>
+          <a:p>
+            <a:pPr algn="ctr" indent="0" marL="0">
+              <a:buNone/>
+            </a:pPr>
+            <a:r>
+              <a:rPr lang="en-US" sz="11000" b="1" spc="400" kern="0" dirty="0">
+                <a:solidFill>
+                  <a:srgbClr val="2F5D8A"/>
+                </a:solidFill>
+              </a:rPr>
+              <a:t>수업분과</a:t>
+            </a:r>
+            <a:endParaRPr lang="en-US" sz="11000" dirty="0"/>
+          </a:p>
+        </p:txBody>
+      </p:sp>
+      <p:sp>
+        <p:nvSpPr>
+          <p:cNvPr id="9" name="라벨"/>
+          <p:cNvSpPr txBox="1"/>
+          <p:nvPr/>
+        </p:nvSpPr>
+        <p:spPr>
+          <a:xfrm>
+            <a:off x="3607308" y="5166360"/>
+            <a:ext cx="3474720" cy="914400"/>
+          </a:xfrm>
+          <a:prstGeom prst="roundRect">
+            <a:avLst>
+              <a:gd name="adj" fmla="val 50000"/>
+            </a:avLst>
+          </a:prstGeom>
+          <a:solidFill>
+            <a:srgbClr val="2F5D8A"/>
+          </a:solidFill>
+          <a:ln/>
+        </p:spPr>
+        <p:txBody>
+          <a:bodyPr wrap="square" lIns="0" tIns="0" rIns="0" bIns="0" rtlCol="0" anchor="ctr"/>
+          <a:lstStyle/>
+          <a:p>
+            <a:pPr algn="ctr" indent="0" marL="0">
+              <a:buNone/>
+            </a:pPr>
+            <a:r>
+              <a:rPr lang="en-US" sz="5000" b="1" dirty="0">
+                <a:solidFill>
+                  <a:srgbClr val="FFFFFF"/>
+                </a:solidFill>
+              </a:rPr>
+              <a:t>4학년</a:t>
+            </a:r>
+            <a:endParaRPr lang="en-US" sz="5000" dirty="0"/>
+          </a:p>
+        </p:txBody>
+      </p:sp>
+      <p:sp>
+        <p:nvSpPr>
+          <p:cNvPr id="10" name="Text 0"/>
+          <p:cNvSpPr/>
+          <p:nvPr>
+            <p:ph idx="100" type="body" hasCustomPrompt="1"/>
+          </p:nvPr>
+        </p:nvSpPr>
+        <p:spPr>
+          <a:xfrm>
+            <a:off x="822960" y="384048"/>
+            <a:ext cx="6400800" cy="411480"/>
+          </a:xfrm>
+          <a:prstGeom prst="rect">
+            <a:avLst/>
+          </a:prstGeom>
+          <a:noFill/>
+          <a:ln/>
+        </p:spPr>
+        <p:txBody>
+          <a:bodyPr wrap="square" lIns="0" tIns="0" rIns="0" bIns="0" rtlCol="0" anchor="ctr"/>
+          <a:lstStyle/>
+          <a:p>
+            <a:pPr algn="l" indent="0" marL="0">
+              <a:buNone/>
+            </a:pPr>
+            <a:r>
+              <a:rPr lang="en-US" sz="1400" dirty="0">
                 <a:solidFill>
                   <a:schemeClr val="tx2"/>
                 </a:solidFill>
               </a:rPr>
               <a:t>2026학년도 학교자율시간 연구학교 운영 보고회</a:t>
             </a:r>
-            <a:endParaRPr lang="en-US" sz="2200" dirty="0"/>
-          </a:p>
-        </p:txBody>
-      </p:sp>
-      <p:sp>
-        <p:nvSpPr>
-          <p:cNvPr id="4" name="Text 0"/>
-          <p:cNvSpPr/>
-          <p:nvPr>
-            <p:ph idx="102" type="title" hasCustomPrompt="1"/>
-          </p:nvPr>
-        </p:nvSpPr>
-        <p:spPr>
-          <a:xfrm>
-            <a:off x="822960" y="1737360"/>
-            <a:ext cx="9043416" cy="2377440"/>
+            <a:endParaRPr lang="en-US" sz="1400" dirty="0"/>
+          </a:p>
+        </p:txBody>
+      </p:sp>
+      <p:sp>
+        <p:nvSpPr>
+          <p:cNvPr id="11" name="Text 0"/>
+          <p:cNvSpPr/>
+          <p:nvPr>
+            <p:ph idx="101" type="body" hasCustomPrompt="1"/>
+          </p:nvPr>
+        </p:nvSpPr>
+        <p:spPr>
+          <a:xfrm>
+            <a:off x="7223760" y="384048"/>
+            <a:ext cx="2642616" cy="411480"/>
           </a:xfrm>
           <a:prstGeom prst="rect">
             <a:avLst/>
@@ -2794,94 +3488,18 @@
           <a:bodyPr wrap="square" lIns="0" tIns="0" rIns="0" bIns="0" rtlCol="0" anchor="ctr"/>
           <a:lstStyle/>
           <a:p>
-            <a:pPr algn="ctr" indent="0" marL="0">
+            <a:pPr algn="r" indent="0" marL="0">
               <a:buNone/>
             </a:pPr>
             <a:r>
-              <a:rPr lang="en-US" sz="13000" b="1" dirty="0">
-                <a:solidFill>
-                  <a:schemeClr val="tx1"/>
-                </a:solidFill>
-              </a:rPr>
-              <a:t>수업분과</a:t>
-            </a:r>
-            <a:endParaRPr lang="en-US" sz="13000" dirty="0"/>
-          </a:p>
-        </p:txBody>
-      </p:sp>
-      <p:sp>
-        <p:nvSpPr>
-          <p:cNvPr id="5" name="Text 0"/>
-          <p:cNvSpPr/>
-          <p:nvPr>
-            <p:ph idx="103" type="body" hasCustomPrompt="1"/>
-          </p:nvPr>
-        </p:nvSpPr>
-        <p:spPr>
-          <a:xfrm>
-            <a:off x="822960" y="4480560"/>
-            <a:ext cx="9043416" cy="1371600"/>
-          </a:xfrm>
-          <a:prstGeom prst="rect">
-            <a:avLst/>
-          </a:prstGeom>
-          <a:noFill/>
-          <a:ln/>
-        </p:spPr>
-        <p:txBody>
-          <a:bodyPr wrap="square" lIns="0" tIns="0" rIns="0" bIns="0" rtlCol="0" anchor="ctr"/>
-          <a:lstStyle/>
-          <a:p>
-            <a:pPr algn="ctr" indent="0" marL="0">
-              <a:buNone/>
-            </a:pPr>
-            <a:r>
-              <a:rPr lang="en-US" sz="8000" b="1" dirty="0">
-                <a:solidFill>
-                  <a:schemeClr val="tx1"/>
-                </a:solidFill>
-              </a:rPr>
-              <a:t>4학년</a:t>
-            </a:r>
-            <a:endParaRPr lang="en-US" sz="8000" dirty="0"/>
-          </a:p>
-        </p:txBody>
-      </p:sp>
-      <p:sp>
-        <p:nvSpPr>
-          <p:cNvPr id="6" name="Text 0"/>
-          <p:cNvSpPr/>
-          <p:nvPr>
-            <p:ph idx="101" type="body" hasCustomPrompt="1"/>
-          </p:nvPr>
-        </p:nvSpPr>
-        <p:spPr>
-          <a:xfrm>
-            <a:off x="822960" y="6172200"/>
-            <a:ext cx="9043416" cy="457200"/>
-          </a:xfrm>
-          <a:prstGeom prst="rect">
-            <a:avLst/>
-          </a:prstGeom>
-          <a:noFill/>
-          <a:ln/>
-        </p:spPr>
-        <p:txBody>
-          <a:bodyPr wrap="square" lIns="0" tIns="0" rIns="0" bIns="0" rtlCol="0" anchor="ctr"/>
-          <a:lstStyle/>
-          <a:p>
-            <a:pPr algn="ctr" indent="0" marL="0">
-              <a:buNone/>
-            </a:pPr>
-            <a:r>
-              <a:rPr lang="en-US" sz="2000" dirty="0">
+              <a:rPr lang="en-US" sz="1400" b="1" dirty="0">
                 <a:solidFill>
                   <a:schemeClr val="tx2"/>
                 </a:solidFill>
               </a:rPr>
               <a:t>광양중동초등학교</a:t>
             </a:r>
-            <a:endParaRPr lang="en-US" sz="2000" dirty="0"/>
+            <a:endParaRPr lang="en-US" sz="1400" dirty="0"/>
           </a:p>
         </p:txBody>
       </p:sp>
@@ -2896,6 +3514,13 @@
 <file path=ppt/slides/slide7.xml><?xml version="1.0" encoding="utf-8"?>
 <p:sld xmlns:a="http://schemas.openxmlformats.org/drawingml/2006/main" xmlns:r="http://schemas.openxmlformats.org/officeDocument/2006/relationships" xmlns:p="http://schemas.openxmlformats.org/presentationml/2006/main">
   <p:cSld name="Slide 7">
+    <p:bg>
+      <p:bgPr>
+        <a:solidFill>
+          <a:srgbClr val="F1F6FC"/>
+        </a:solidFill>
+      </p:bgPr>
+    </p:bg>
     <p:spTree>
       <p:nvGrpSpPr>
         <p:cNvPr id="1" name=""/>
@@ -2912,43 +3537,96 @@
       </p:grpSpPr>
       <p:sp>
         <p:nvSpPr>
-          <p:cNvPr id="2" name="카드"/>
-          <p:cNvSpPr/>
-          <p:nvPr/>
-        </p:nvSpPr>
-        <p:spPr>
-          <a:xfrm>
-            <a:off x="457200" y="457200"/>
-            <a:ext cx="9774936" cy="6647688"/>
+          <p:cNvPr id="2" name="장식 원"/>
+          <p:cNvSpPr/>
+          <p:nvPr/>
+        </p:nvSpPr>
+        <p:spPr>
+          <a:xfrm>
+            <a:off x="7955280" y="4846320"/>
+            <a:ext cx="4023360" cy="4023360"/>
+          </a:xfrm>
+          <a:prstGeom prst="ellipse">
+            <a:avLst/>
+          </a:prstGeom>
+          <a:solidFill>
+            <a:srgbClr val="D6E6F5">
+              <a:alpha val="70000"/>
+            </a:srgbClr>
+          </a:solidFill>
+          <a:ln/>
+        </p:spPr>
+      </p:sp>
+      <p:sp>
+        <p:nvSpPr>
+          <p:cNvPr id="3" name="장식 원"/>
+          <p:cNvSpPr/>
+          <p:nvPr/>
+        </p:nvSpPr>
+        <p:spPr>
+          <a:xfrm>
+            <a:off x="-1463040" y="-1463040"/>
+            <a:ext cx="2377440" cy="2377440"/>
+          </a:xfrm>
+          <a:prstGeom prst="ellipse">
+            <a:avLst/>
+          </a:prstGeom>
+          <a:solidFill>
+            <a:srgbClr val="D6E6F5">
+              <a:alpha val="60000"/>
+            </a:srgbClr>
+          </a:solidFill>
+          <a:ln/>
+        </p:spPr>
+      </p:sp>
+      <p:sp>
+        <p:nvSpPr>
+          <p:cNvPr id="4" name="카드"/>
+          <p:cNvSpPr/>
+          <p:nvPr/>
+        </p:nvSpPr>
+        <p:spPr>
+          <a:xfrm>
+            <a:off x="822960" y="1005840"/>
+            <a:ext cx="9043416" cy="5577840"/>
           </a:xfrm>
           <a:prstGeom prst="roundRect">
             <a:avLst>
-              <a:gd name="adj" fmla="val 4814"/>
+              <a:gd name="adj" fmla="val 6557"/>
             </a:avLst>
           </a:prstGeom>
           <a:solidFill>
-            <a:schemeClr val="accent4"/>
-          </a:solidFill>
-          <a:ln/>
-        </p:spPr>
-      </p:sp>
-      <p:sp>
-        <p:nvSpPr>
-          <p:cNvPr id="3" name="Text 0"/>
-          <p:cNvSpPr/>
-          <p:nvPr>
-            <p:ph idx="100" type="body" hasCustomPrompt="1"/>
-          </p:nvPr>
-        </p:nvSpPr>
-        <p:spPr>
-          <a:xfrm>
-            <a:off x="822960" y="914400"/>
-            <a:ext cx="9043416" cy="548640"/>
-          </a:xfrm>
-          <a:prstGeom prst="rect">
-            <a:avLst/>
-          </a:prstGeom>
-          <a:noFill/>
+            <a:srgbClr val="FFFFFF"/>
+          </a:solidFill>
+          <a:ln/>
+          <a:effectLst>
+            <a:outerShdw sx="100000" sy="100000" kx="0" ky="0" algn="bl" rotWithShape="0" blurRad="228600" dist="50800" dir="5400000">
+              <a:srgbClr val="000000">
+                <a:alpha val="10000"/>
+              </a:srgbClr>
+            </a:outerShdw>
+          </a:effectLst>
+        </p:spPr>
+      </p:sp>
+      <p:sp>
+        <p:nvSpPr>
+          <p:cNvPr id="5" name="라벨"/>
+          <p:cNvSpPr txBox="1"/>
+          <p:nvPr/>
+        </p:nvSpPr>
+        <p:spPr>
+          <a:xfrm>
+            <a:off x="4201668" y="1417320"/>
+            <a:ext cx="2286000" cy="475488"/>
+          </a:xfrm>
+          <a:prstGeom prst="roundRect">
+            <a:avLst>
+              <a:gd name="adj" fmla="val 50000"/>
+            </a:avLst>
+          </a:prstGeom>
+          <a:solidFill>
+            <a:srgbClr val="D6E6F5"/>
+          </a:solidFill>
           <a:ln/>
         </p:spPr>
         <p:txBody>
@@ -2959,29 +3637,187 @@
               <a:buNone/>
             </a:pPr>
             <a:r>
-              <a:rPr lang="en-US" sz="2200" dirty="0">
+              <a:rPr lang="en-US" sz="1800" dirty="0">
+                <a:solidFill>
+                  <a:srgbClr val="2F5D8A"/>
+                </a:solidFill>
+              </a:rPr>
+              <a:t>본교 교원석</a:t>
+            </a:r>
+            <a:endParaRPr lang="en-US" sz="1800" dirty="0"/>
+          </a:p>
+        </p:txBody>
+      </p:sp>
+      <p:sp>
+        <p:nvSpPr>
+          <p:cNvPr id="6" name="장식 원"/>
+          <p:cNvSpPr/>
+          <p:nvPr/>
+        </p:nvSpPr>
+        <p:spPr>
+          <a:xfrm>
+            <a:off x="4773168" y="2148840"/>
+            <a:ext cx="1143000" cy="1143000"/>
+          </a:xfrm>
+          <a:prstGeom prst="ellipse">
+            <a:avLst/>
+          </a:prstGeom>
+          <a:solidFill>
+            <a:srgbClr val="D6E6F5"/>
+          </a:solidFill>
+          <a:ln/>
+        </p:spPr>
+      </p:sp>
+      <p:pic>
+        <p:nvPicPr>
+          <p:cNvPr id="7" name="아이콘" descr="수업분과 아이콘">    </p:cNvPr>
+          <p:cNvPicPr>
+            <a:picLocks noChangeAspect="1"/>
+          </p:cNvPicPr>
+          <p:nvPr/>
+        </p:nvPicPr>
+        <p:blipFill>
+          <a:blip r:embed="rId1"/>
+          <a:stretch>
+            <a:fillRect/>
+          </a:stretch>
+        </p:blipFill>
+        <p:spPr>
+          <a:xfrm>
+            <a:off x="5001768" y="2377440"/>
+            <a:ext cx="685800" cy="685800"/>
+          </a:xfrm>
+          <a:prstGeom prst="rect">
+            <a:avLst/>
+          </a:prstGeom>
+        </p:spPr>
+      </p:pic>
+      <p:sp>
+        <p:nvSpPr>
+          <p:cNvPr id="8" name="분과명"/>
+          <p:cNvSpPr txBox="1"/>
+          <p:nvPr/>
+        </p:nvSpPr>
+        <p:spPr>
+          <a:xfrm>
+            <a:off x="822960" y="3383280"/>
+            <a:ext cx="9043416" cy="1600200"/>
+          </a:xfrm>
+          <a:prstGeom prst="rect">
+            <a:avLst/>
+          </a:prstGeom>
+          <a:noFill/>
+          <a:ln/>
+        </p:spPr>
+        <p:txBody>
+          <a:bodyPr wrap="square" lIns="0" tIns="0" rIns="0" bIns="0" rtlCol="0" anchor="ctr"/>
+          <a:lstStyle/>
+          <a:p>
+            <a:pPr algn="ctr" indent="0" marL="0">
+              <a:buNone/>
+            </a:pPr>
+            <a:r>
+              <a:rPr lang="en-US" sz="11000" b="1" spc="400" kern="0" dirty="0">
+                <a:solidFill>
+                  <a:srgbClr val="2F5D8A"/>
+                </a:solidFill>
+              </a:rPr>
+              <a:t>수업분과</a:t>
+            </a:r>
+            <a:endParaRPr lang="en-US" sz="11000" dirty="0"/>
+          </a:p>
+        </p:txBody>
+      </p:sp>
+      <p:sp>
+        <p:nvSpPr>
+          <p:cNvPr id="9" name="라벨"/>
+          <p:cNvSpPr txBox="1"/>
+          <p:nvPr/>
+        </p:nvSpPr>
+        <p:spPr>
+          <a:xfrm>
+            <a:off x="3607308" y="5166360"/>
+            <a:ext cx="3474720" cy="914400"/>
+          </a:xfrm>
+          <a:prstGeom prst="roundRect">
+            <a:avLst>
+              <a:gd name="adj" fmla="val 50000"/>
+            </a:avLst>
+          </a:prstGeom>
+          <a:solidFill>
+            <a:srgbClr val="2F5D8A"/>
+          </a:solidFill>
+          <a:ln/>
+        </p:spPr>
+        <p:txBody>
+          <a:bodyPr wrap="square" lIns="0" tIns="0" rIns="0" bIns="0" rtlCol="0" anchor="ctr"/>
+          <a:lstStyle/>
+          <a:p>
+            <a:pPr algn="ctr" indent="0" marL="0">
+              <a:buNone/>
+            </a:pPr>
+            <a:r>
+              <a:rPr lang="en-US" sz="5000" b="1" dirty="0">
+                <a:solidFill>
+                  <a:srgbClr val="FFFFFF"/>
+                </a:solidFill>
+              </a:rPr>
+              <a:t>5학년</a:t>
+            </a:r>
+            <a:endParaRPr lang="en-US" sz="5000" dirty="0"/>
+          </a:p>
+        </p:txBody>
+      </p:sp>
+      <p:sp>
+        <p:nvSpPr>
+          <p:cNvPr id="10" name="Text 0"/>
+          <p:cNvSpPr/>
+          <p:nvPr>
+            <p:ph idx="100" type="body" hasCustomPrompt="1"/>
+          </p:nvPr>
+        </p:nvSpPr>
+        <p:spPr>
+          <a:xfrm>
+            <a:off x="822960" y="384048"/>
+            <a:ext cx="6400800" cy="411480"/>
+          </a:xfrm>
+          <a:prstGeom prst="rect">
+            <a:avLst/>
+          </a:prstGeom>
+          <a:noFill/>
+          <a:ln/>
+        </p:spPr>
+        <p:txBody>
+          <a:bodyPr wrap="square" lIns="0" tIns="0" rIns="0" bIns="0" rtlCol="0" anchor="ctr"/>
+          <a:lstStyle/>
+          <a:p>
+            <a:pPr algn="l" indent="0" marL="0">
+              <a:buNone/>
+            </a:pPr>
+            <a:r>
+              <a:rPr lang="en-US" sz="1400" dirty="0">
                 <a:solidFill>
                   <a:schemeClr val="tx2"/>
                 </a:solidFill>
               </a:rPr>
               <a:t>2026학년도 학교자율시간 연구학교 운영 보고회</a:t>
             </a:r>
-            <a:endParaRPr lang="en-US" sz="2200" dirty="0"/>
-          </a:p>
-        </p:txBody>
-      </p:sp>
-      <p:sp>
-        <p:nvSpPr>
-          <p:cNvPr id="4" name="Text 0"/>
-          <p:cNvSpPr/>
-          <p:nvPr>
-            <p:ph idx="102" type="title" hasCustomPrompt="1"/>
-          </p:nvPr>
-        </p:nvSpPr>
-        <p:spPr>
-          <a:xfrm>
-            <a:off x="822960" y="1737360"/>
-            <a:ext cx="9043416" cy="2377440"/>
+            <a:endParaRPr lang="en-US" sz="1400" dirty="0"/>
+          </a:p>
+        </p:txBody>
+      </p:sp>
+      <p:sp>
+        <p:nvSpPr>
+          <p:cNvPr id="11" name="Text 0"/>
+          <p:cNvSpPr/>
+          <p:nvPr>
+            <p:ph idx="101" type="body" hasCustomPrompt="1"/>
+          </p:nvPr>
+        </p:nvSpPr>
+        <p:spPr>
+          <a:xfrm>
+            <a:off x="7223760" y="384048"/>
+            <a:ext cx="2642616" cy="411480"/>
           </a:xfrm>
           <a:prstGeom prst="rect">
             <a:avLst/>
@@ -2993,94 +3829,18 @@
           <a:bodyPr wrap="square" lIns="0" tIns="0" rIns="0" bIns="0" rtlCol="0" anchor="ctr"/>
           <a:lstStyle/>
           <a:p>
-            <a:pPr algn="ctr" indent="0" marL="0">
+            <a:pPr algn="r" indent="0" marL="0">
               <a:buNone/>
             </a:pPr>
             <a:r>
-              <a:rPr lang="en-US" sz="13000" b="1" dirty="0">
-                <a:solidFill>
-                  <a:schemeClr val="tx1"/>
-                </a:solidFill>
-              </a:rPr>
-              <a:t>수업분과</a:t>
-            </a:r>
-            <a:endParaRPr lang="en-US" sz="13000" dirty="0"/>
-          </a:p>
-        </p:txBody>
-      </p:sp>
-      <p:sp>
-        <p:nvSpPr>
-          <p:cNvPr id="5" name="Text 0"/>
-          <p:cNvSpPr/>
-          <p:nvPr>
-            <p:ph idx="103" type="body" hasCustomPrompt="1"/>
-          </p:nvPr>
-        </p:nvSpPr>
-        <p:spPr>
-          <a:xfrm>
-            <a:off x="822960" y="4480560"/>
-            <a:ext cx="9043416" cy="1371600"/>
-          </a:xfrm>
-          <a:prstGeom prst="rect">
-            <a:avLst/>
-          </a:prstGeom>
-          <a:noFill/>
-          <a:ln/>
-        </p:spPr>
-        <p:txBody>
-          <a:bodyPr wrap="square" lIns="0" tIns="0" rIns="0" bIns="0" rtlCol="0" anchor="ctr"/>
-          <a:lstStyle/>
-          <a:p>
-            <a:pPr algn="ctr" indent="0" marL="0">
-              <a:buNone/>
-            </a:pPr>
-            <a:r>
-              <a:rPr lang="en-US" sz="8000" b="1" dirty="0">
-                <a:solidFill>
-                  <a:schemeClr val="tx1"/>
-                </a:solidFill>
-              </a:rPr>
-              <a:t>5학년</a:t>
-            </a:r>
-            <a:endParaRPr lang="en-US" sz="8000" dirty="0"/>
-          </a:p>
-        </p:txBody>
-      </p:sp>
-      <p:sp>
-        <p:nvSpPr>
-          <p:cNvPr id="6" name="Text 0"/>
-          <p:cNvSpPr/>
-          <p:nvPr>
-            <p:ph idx="101" type="body" hasCustomPrompt="1"/>
-          </p:nvPr>
-        </p:nvSpPr>
-        <p:spPr>
-          <a:xfrm>
-            <a:off x="822960" y="6172200"/>
-            <a:ext cx="9043416" cy="457200"/>
-          </a:xfrm>
-          <a:prstGeom prst="rect">
-            <a:avLst/>
-          </a:prstGeom>
-          <a:noFill/>
-          <a:ln/>
-        </p:spPr>
-        <p:txBody>
-          <a:bodyPr wrap="square" lIns="0" tIns="0" rIns="0" bIns="0" rtlCol="0" anchor="ctr"/>
-          <a:lstStyle/>
-          <a:p>
-            <a:pPr algn="ctr" indent="0" marL="0">
-              <a:buNone/>
-            </a:pPr>
-            <a:r>
-              <a:rPr lang="en-US" sz="2000" dirty="0">
+              <a:rPr lang="en-US" sz="1400" b="1" dirty="0">
                 <a:solidFill>
                   <a:schemeClr val="tx2"/>
                 </a:solidFill>
               </a:rPr>
               <a:t>광양중동초등학교</a:t>
             </a:r>
-            <a:endParaRPr lang="en-US" sz="2000" dirty="0"/>
+            <a:endParaRPr lang="en-US" sz="1400" dirty="0"/>
           </a:p>
         </p:txBody>
       </p:sp>
@@ -3095,6 +3855,13 @@
 <file path=ppt/slides/slide8.xml><?xml version="1.0" encoding="utf-8"?>
 <p:sld xmlns:a="http://schemas.openxmlformats.org/drawingml/2006/main" xmlns:r="http://schemas.openxmlformats.org/officeDocument/2006/relationships" xmlns:p="http://schemas.openxmlformats.org/presentationml/2006/main">
   <p:cSld name="Slide 8">
+    <p:bg>
+      <p:bgPr>
+        <a:solidFill>
+          <a:srgbClr val="F1F6FC"/>
+        </a:solidFill>
+      </p:bgPr>
+    </p:bg>
     <p:spTree>
       <p:nvGrpSpPr>
         <p:cNvPr id="1" name=""/>
@@ -3111,43 +3878,96 @@
       </p:grpSpPr>
       <p:sp>
         <p:nvSpPr>
-          <p:cNvPr id="2" name="카드"/>
-          <p:cNvSpPr/>
-          <p:nvPr/>
-        </p:nvSpPr>
-        <p:spPr>
-          <a:xfrm>
-            <a:off x="457200" y="457200"/>
-            <a:ext cx="9774936" cy="6647688"/>
+          <p:cNvPr id="2" name="장식 원"/>
+          <p:cNvSpPr/>
+          <p:nvPr/>
+        </p:nvSpPr>
+        <p:spPr>
+          <a:xfrm>
+            <a:off x="7955280" y="4846320"/>
+            <a:ext cx="4023360" cy="4023360"/>
+          </a:xfrm>
+          <a:prstGeom prst="ellipse">
+            <a:avLst/>
+          </a:prstGeom>
+          <a:solidFill>
+            <a:srgbClr val="D6E6F5">
+              <a:alpha val="70000"/>
+            </a:srgbClr>
+          </a:solidFill>
+          <a:ln/>
+        </p:spPr>
+      </p:sp>
+      <p:sp>
+        <p:nvSpPr>
+          <p:cNvPr id="3" name="장식 원"/>
+          <p:cNvSpPr/>
+          <p:nvPr/>
+        </p:nvSpPr>
+        <p:spPr>
+          <a:xfrm>
+            <a:off x="-1463040" y="-1463040"/>
+            <a:ext cx="2377440" cy="2377440"/>
+          </a:xfrm>
+          <a:prstGeom prst="ellipse">
+            <a:avLst/>
+          </a:prstGeom>
+          <a:solidFill>
+            <a:srgbClr val="D6E6F5">
+              <a:alpha val="60000"/>
+            </a:srgbClr>
+          </a:solidFill>
+          <a:ln/>
+        </p:spPr>
+      </p:sp>
+      <p:sp>
+        <p:nvSpPr>
+          <p:cNvPr id="4" name="카드"/>
+          <p:cNvSpPr/>
+          <p:nvPr/>
+        </p:nvSpPr>
+        <p:spPr>
+          <a:xfrm>
+            <a:off x="822960" y="1005840"/>
+            <a:ext cx="9043416" cy="5577840"/>
           </a:xfrm>
           <a:prstGeom prst="roundRect">
             <a:avLst>
-              <a:gd name="adj" fmla="val 4814"/>
+              <a:gd name="adj" fmla="val 6557"/>
             </a:avLst>
           </a:prstGeom>
           <a:solidFill>
-            <a:schemeClr val="accent4"/>
-          </a:solidFill>
-          <a:ln/>
-        </p:spPr>
-      </p:sp>
-      <p:sp>
-        <p:nvSpPr>
-          <p:cNvPr id="3" name="Text 0"/>
-          <p:cNvSpPr/>
-          <p:nvPr>
-            <p:ph idx="100" type="body" hasCustomPrompt="1"/>
-          </p:nvPr>
-        </p:nvSpPr>
-        <p:spPr>
-          <a:xfrm>
-            <a:off x="822960" y="914400"/>
-            <a:ext cx="9043416" cy="548640"/>
-          </a:xfrm>
-          <a:prstGeom prst="rect">
-            <a:avLst/>
-          </a:prstGeom>
-          <a:noFill/>
+            <a:srgbClr val="FFFFFF"/>
+          </a:solidFill>
+          <a:ln/>
+          <a:effectLst>
+            <a:outerShdw sx="100000" sy="100000" kx="0" ky="0" algn="bl" rotWithShape="0" blurRad="228600" dist="50800" dir="5400000">
+              <a:srgbClr val="000000">
+                <a:alpha val="10000"/>
+              </a:srgbClr>
+            </a:outerShdw>
+          </a:effectLst>
+        </p:spPr>
+      </p:sp>
+      <p:sp>
+        <p:nvSpPr>
+          <p:cNvPr id="5" name="라벨"/>
+          <p:cNvSpPr txBox="1"/>
+          <p:nvPr/>
+        </p:nvSpPr>
+        <p:spPr>
+          <a:xfrm>
+            <a:off x="4201668" y="1417320"/>
+            <a:ext cx="2286000" cy="475488"/>
+          </a:xfrm>
+          <a:prstGeom prst="roundRect">
+            <a:avLst>
+              <a:gd name="adj" fmla="val 50000"/>
+            </a:avLst>
+          </a:prstGeom>
+          <a:solidFill>
+            <a:srgbClr val="D6E6F5"/>
+          </a:solidFill>
           <a:ln/>
         </p:spPr>
         <p:txBody>
@@ -3158,29 +3978,187 @@
               <a:buNone/>
             </a:pPr>
             <a:r>
-              <a:rPr lang="en-US" sz="2200" dirty="0">
+              <a:rPr lang="en-US" sz="1800" dirty="0">
+                <a:solidFill>
+                  <a:srgbClr val="2F5D8A"/>
+                </a:solidFill>
+              </a:rPr>
+              <a:t>본교 교원석</a:t>
+            </a:r>
+            <a:endParaRPr lang="en-US" sz="1800" dirty="0"/>
+          </a:p>
+        </p:txBody>
+      </p:sp>
+      <p:sp>
+        <p:nvSpPr>
+          <p:cNvPr id="6" name="장식 원"/>
+          <p:cNvSpPr/>
+          <p:nvPr/>
+        </p:nvSpPr>
+        <p:spPr>
+          <a:xfrm>
+            <a:off x="4773168" y="2148840"/>
+            <a:ext cx="1143000" cy="1143000"/>
+          </a:xfrm>
+          <a:prstGeom prst="ellipse">
+            <a:avLst/>
+          </a:prstGeom>
+          <a:solidFill>
+            <a:srgbClr val="D6E6F5"/>
+          </a:solidFill>
+          <a:ln/>
+        </p:spPr>
+      </p:sp>
+      <p:pic>
+        <p:nvPicPr>
+          <p:cNvPr id="7" name="아이콘" descr="수업분과 아이콘">    </p:cNvPr>
+          <p:cNvPicPr>
+            <a:picLocks noChangeAspect="1"/>
+          </p:cNvPicPr>
+          <p:nvPr/>
+        </p:nvPicPr>
+        <p:blipFill>
+          <a:blip r:embed="rId1"/>
+          <a:stretch>
+            <a:fillRect/>
+          </a:stretch>
+        </p:blipFill>
+        <p:spPr>
+          <a:xfrm>
+            <a:off x="5001768" y="2377440"/>
+            <a:ext cx="685800" cy="685800"/>
+          </a:xfrm>
+          <a:prstGeom prst="rect">
+            <a:avLst/>
+          </a:prstGeom>
+        </p:spPr>
+      </p:pic>
+      <p:sp>
+        <p:nvSpPr>
+          <p:cNvPr id="8" name="분과명"/>
+          <p:cNvSpPr txBox="1"/>
+          <p:nvPr/>
+        </p:nvSpPr>
+        <p:spPr>
+          <a:xfrm>
+            <a:off x="822960" y="3383280"/>
+            <a:ext cx="9043416" cy="1600200"/>
+          </a:xfrm>
+          <a:prstGeom prst="rect">
+            <a:avLst/>
+          </a:prstGeom>
+          <a:noFill/>
+          <a:ln/>
+        </p:spPr>
+        <p:txBody>
+          <a:bodyPr wrap="square" lIns="0" tIns="0" rIns="0" bIns="0" rtlCol="0" anchor="ctr"/>
+          <a:lstStyle/>
+          <a:p>
+            <a:pPr algn="ctr" indent="0" marL="0">
+              <a:buNone/>
+            </a:pPr>
+            <a:r>
+              <a:rPr lang="en-US" sz="11000" b="1" spc="400" kern="0" dirty="0">
+                <a:solidFill>
+                  <a:srgbClr val="2F5D8A"/>
+                </a:solidFill>
+              </a:rPr>
+              <a:t>수업분과</a:t>
+            </a:r>
+            <a:endParaRPr lang="en-US" sz="11000" dirty="0"/>
+          </a:p>
+        </p:txBody>
+      </p:sp>
+      <p:sp>
+        <p:nvSpPr>
+          <p:cNvPr id="9" name="라벨"/>
+          <p:cNvSpPr txBox="1"/>
+          <p:nvPr/>
+        </p:nvSpPr>
+        <p:spPr>
+          <a:xfrm>
+            <a:off x="3607308" y="5166360"/>
+            <a:ext cx="3474720" cy="914400"/>
+          </a:xfrm>
+          <a:prstGeom prst="roundRect">
+            <a:avLst>
+              <a:gd name="adj" fmla="val 50000"/>
+            </a:avLst>
+          </a:prstGeom>
+          <a:solidFill>
+            <a:srgbClr val="2F5D8A"/>
+          </a:solidFill>
+          <a:ln/>
+        </p:spPr>
+        <p:txBody>
+          <a:bodyPr wrap="square" lIns="0" tIns="0" rIns="0" bIns="0" rtlCol="0" anchor="ctr"/>
+          <a:lstStyle/>
+          <a:p>
+            <a:pPr algn="ctr" indent="0" marL="0">
+              <a:buNone/>
+            </a:pPr>
+            <a:r>
+              <a:rPr lang="en-US" sz="5000" b="1" dirty="0">
+                <a:solidFill>
+                  <a:srgbClr val="FFFFFF"/>
+                </a:solidFill>
+              </a:rPr>
+              <a:t>6학년</a:t>
+            </a:r>
+            <a:endParaRPr lang="en-US" sz="5000" dirty="0"/>
+          </a:p>
+        </p:txBody>
+      </p:sp>
+      <p:sp>
+        <p:nvSpPr>
+          <p:cNvPr id="10" name="Text 0"/>
+          <p:cNvSpPr/>
+          <p:nvPr>
+            <p:ph idx="100" type="body" hasCustomPrompt="1"/>
+          </p:nvPr>
+        </p:nvSpPr>
+        <p:spPr>
+          <a:xfrm>
+            <a:off x="822960" y="384048"/>
+            <a:ext cx="6400800" cy="411480"/>
+          </a:xfrm>
+          <a:prstGeom prst="rect">
+            <a:avLst/>
+          </a:prstGeom>
+          <a:noFill/>
+          <a:ln/>
+        </p:spPr>
+        <p:txBody>
+          <a:bodyPr wrap="square" lIns="0" tIns="0" rIns="0" bIns="0" rtlCol="0" anchor="ctr"/>
+          <a:lstStyle/>
+          <a:p>
+            <a:pPr algn="l" indent="0" marL="0">
+              <a:buNone/>
+            </a:pPr>
+            <a:r>
+              <a:rPr lang="en-US" sz="1400" dirty="0">
                 <a:solidFill>
                   <a:schemeClr val="tx2"/>
                 </a:solidFill>
               </a:rPr>
               <a:t>2026학년도 학교자율시간 연구학교 운영 보고회</a:t>
             </a:r>
-            <a:endParaRPr lang="en-US" sz="2200" dirty="0"/>
-          </a:p>
-        </p:txBody>
-      </p:sp>
-      <p:sp>
-        <p:nvSpPr>
-          <p:cNvPr id="4" name="Text 0"/>
-          <p:cNvSpPr/>
-          <p:nvPr>
-            <p:ph idx="102" type="title" hasCustomPrompt="1"/>
-          </p:nvPr>
-        </p:nvSpPr>
-        <p:spPr>
-          <a:xfrm>
-            <a:off x="822960" y="1737360"/>
-            <a:ext cx="9043416" cy="2377440"/>
+            <a:endParaRPr lang="en-US" sz="1400" dirty="0"/>
+          </a:p>
+        </p:txBody>
+      </p:sp>
+      <p:sp>
+        <p:nvSpPr>
+          <p:cNvPr id="11" name="Text 0"/>
+          <p:cNvSpPr/>
+          <p:nvPr>
+            <p:ph idx="101" type="body" hasCustomPrompt="1"/>
+          </p:nvPr>
+        </p:nvSpPr>
+        <p:spPr>
+          <a:xfrm>
+            <a:off x="7223760" y="384048"/>
+            <a:ext cx="2642616" cy="411480"/>
           </a:xfrm>
           <a:prstGeom prst="rect">
             <a:avLst/>
@@ -3192,94 +4170,18 @@
           <a:bodyPr wrap="square" lIns="0" tIns="0" rIns="0" bIns="0" rtlCol="0" anchor="ctr"/>
           <a:lstStyle/>
           <a:p>
-            <a:pPr algn="ctr" indent="0" marL="0">
+            <a:pPr algn="r" indent="0" marL="0">
               <a:buNone/>
             </a:pPr>
             <a:r>
-              <a:rPr lang="en-US" sz="13000" b="1" dirty="0">
-                <a:solidFill>
-                  <a:schemeClr val="tx1"/>
-                </a:solidFill>
-              </a:rPr>
-              <a:t>수업분과</a:t>
-            </a:r>
-            <a:endParaRPr lang="en-US" sz="13000" dirty="0"/>
-          </a:p>
-        </p:txBody>
-      </p:sp>
-      <p:sp>
-        <p:nvSpPr>
-          <p:cNvPr id="5" name="Text 0"/>
-          <p:cNvSpPr/>
-          <p:nvPr>
-            <p:ph idx="103" type="body" hasCustomPrompt="1"/>
-          </p:nvPr>
-        </p:nvSpPr>
-        <p:spPr>
-          <a:xfrm>
-            <a:off x="822960" y="4480560"/>
-            <a:ext cx="9043416" cy="1371600"/>
-          </a:xfrm>
-          <a:prstGeom prst="rect">
-            <a:avLst/>
-          </a:prstGeom>
-          <a:noFill/>
-          <a:ln/>
-        </p:spPr>
-        <p:txBody>
-          <a:bodyPr wrap="square" lIns="0" tIns="0" rIns="0" bIns="0" rtlCol="0" anchor="ctr"/>
-          <a:lstStyle/>
-          <a:p>
-            <a:pPr algn="ctr" indent="0" marL="0">
-              <a:buNone/>
-            </a:pPr>
-            <a:r>
-              <a:rPr lang="en-US" sz="8000" b="1" dirty="0">
-                <a:solidFill>
-                  <a:schemeClr val="tx1"/>
-                </a:solidFill>
-              </a:rPr>
-              <a:t>6학년</a:t>
-            </a:r>
-            <a:endParaRPr lang="en-US" sz="8000" dirty="0"/>
-          </a:p>
-        </p:txBody>
-      </p:sp>
-      <p:sp>
-        <p:nvSpPr>
-          <p:cNvPr id="6" name="Text 0"/>
-          <p:cNvSpPr/>
-          <p:nvPr>
-            <p:ph idx="101" type="body" hasCustomPrompt="1"/>
-          </p:nvPr>
-        </p:nvSpPr>
-        <p:spPr>
-          <a:xfrm>
-            <a:off x="822960" y="6172200"/>
-            <a:ext cx="9043416" cy="457200"/>
-          </a:xfrm>
-          <a:prstGeom prst="rect">
-            <a:avLst/>
-          </a:prstGeom>
-          <a:noFill/>
-          <a:ln/>
-        </p:spPr>
-        <p:txBody>
-          <a:bodyPr wrap="square" lIns="0" tIns="0" rIns="0" bIns="0" rtlCol="0" anchor="ctr"/>
-          <a:lstStyle/>
-          <a:p>
-            <a:pPr algn="ctr" indent="0" marL="0">
-              <a:buNone/>
-            </a:pPr>
-            <a:r>
-              <a:rPr lang="en-US" sz="2000" dirty="0">
+              <a:rPr lang="en-US" sz="1400" b="1" dirty="0">
                 <a:solidFill>
                   <a:schemeClr val="tx2"/>
                 </a:solidFill>
               </a:rPr>
               <a:t>광양중동초등학교</a:t>
             </a:r>
-            <a:endParaRPr lang="en-US" sz="2000" dirty="0"/>
+            <a:endParaRPr lang="en-US" sz="1400" dirty="0"/>
           </a:p>
         </p:txBody>
       </p:sp>
@@ -3296,40 +4198,40 @@
   <a:themeElements>
     <a:clrScheme name="분과 안내판">
       <a:dk1>
-        <a:srgbClr val="262626"/>
+        <a:srgbClr val="2E2E33"/>
       </a:dk1>
       <a:lt1>
         <a:srgbClr val="FFFFFF"/>
       </a:lt1>
       <a:dk2>
-        <a:srgbClr val="595959"/>
+        <a:srgbClr val="6B6B73"/>
       </a:dk2>
       <a:lt2>
-        <a:srgbClr val="F2F2F2"/>
+        <a:srgbClr val="F4F4F6"/>
       </a:lt2>
       <a:accent1>
-        <a:srgbClr val="FFCCFF"/>
+        <a:srgbClr val="9B4D8A"/>
       </a:accent1>
       <a:accent2>
-        <a:srgbClr val="FFF2CC"/>
+        <a:srgbClr val="9A6B12"/>
       </a:accent2>
       <a:accent3>
-        <a:srgbClr val="E2F0D9"/>
+        <a:srgbClr val="3F6B45"/>
       </a:accent3>
       <a:accent4>
-        <a:srgbClr val="DEEBF7"/>
+        <a:srgbClr val="2F5D8A"/>
       </a:accent4>
       <a:accent5>
-        <a:srgbClr val="8E2A8E"/>
+        <a:srgbClr val="F3DDEE"/>
       </a:accent5>
       <a:accent6>
-        <a:srgbClr val="1F4E79"/>
+        <a:srgbClr val="D8E7F5"/>
       </a:accent6>
       <a:hlink>
-        <a:srgbClr val="1F4E79"/>
+        <a:srgbClr val="2F5D8A"/>
       </a:hlink>
       <a:folHlink>
-        <a:srgbClr val="8E2A8E"/>
+        <a:srgbClr val="9B4D8A"/>
       </a:folHlink>
     </a:clrScheme>
     <a:fontScheme name="분과 안내판">
